--- a/presentations/01_Internal_Strategy_Staff_Management_AR.pptx
+++ b/presentations/01_Internal_Strategy_Staff_Management_AR.pptx
@@ -131,13 +131,13 @@
   <p:extLst>
     <p:ext uri="{521415D9-36F7-43E2-AB2F-B90AF26B5E84}">
       <p14:sectionLst xmlns:p14="http://schemas.microsoft.com/office/powerpoint/2010/main">
-        <p14:section name="المقدمة" id="{69e8ba50-7e2e-ec6f-aad0-e4ec723fe658}">
+        <p14:section name="المقدمة" id="{8c413497-2f42-783d-f5af-b2d83a451630}">
           <p14:sldIdLst>
             <p14:sldId id="256"/>
             <p14:sldId id="257"/>
           </p14:sldIdLst>
         </p14:section>
-        <p14:section name="الفكرة" id="{4a4728fe-5ff0-7d7d-6d6c-cee3c2de97c0}">
+        <p14:section name="الفكرة" id="{c2d4efce-e5e8-0640-97f4-ceda65a492f0}">
           <p14:sldIdLst>
             <p14:sldId id="258"/>
             <p14:sldId id="259"/>
@@ -145,21 +145,21 @@
             <p14:sldId id="261"/>
           </p14:sldIdLst>
         </p14:section>
-        <p14:section name="الوسطاء" id="{5bd8ee32-9afa-3884-6a09-39de5301cc73}">
+        <p14:section name="الوسطاء" id="{6413e8db-8461-4242-e3a8-2130beb73f51}">
           <p14:sldIdLst>
             <p14:sldId id="262"/>
             <p14:sldId id="263"/>
             <p14:sldId id="264"/>
           </p14:sldIdLst>
         </p14:section>
-        <p14:section name="نموذج التعاون" id="{720b8d5f-bf3a-7fa6-682d-acce87c21421}">
+        <p14:section name="نموذج التعاون" id="{b6ebf3c9-bd68-1fda-c919-1804c40be941}">
           <p14:sldIdLst>
             <p14:sldId id="265"/>
             <p14:sldId id="266"/>
             <p14:sldId id="267"/>
           </p14:sldIdLst>
         </p14:section>
-        <p14:section name="مسار العمل" id="{cc7ecccf-c9a0-7af8-2af2-85e2ffaa484b}">
+        <p14:section name="مسار العمل" id="{a5e5429e-c756-061b-d403-ed69a8880019}">
           <p14:sldIdLst>
             <p14:sldId id="268"/>
             <p14:sldId id="269"/>
@@ -167,7 +167,7 @@
             <p14:sldId id="271"/>
           </p14:sldIdLst>
         </p14:section>
-        <p14:section name="المال والتسويق" id="{9064b98d-e6f5-cdd2-8a78-351df986f212}">
+        <p14:section name="المال والتسويق" id="{01ad42e9-a0fa-dca5-7c29-506bb858a156}">
           <p14:sldIdLst>
             <p14:sldId id="272"/>
             <p14:sldId id="273"/>
@@ -175,7 +175,7 @@
             <p14:sldId id="275"/>
           </p14:sldIdLst>
         </p14:section>
-        <p14:section name="الأدوار والإطلاق" id="{4e15633d-92bf-0eba-50ab-7209e4521997}">
+        <p14:section name="الأدوار والإطلاق" id="{714e8b2f-3572-efb6-1b25-942445643532}">
           <p14:sldIdLst>
             <p14:sldId id="276"/>
             <p14:sldId id="277"/>
@@ -2778,7 +2778,7 @@
     <p:bg>
       <p:bgPr>
         <a:solidFill>
-          <a:srgbClr val="0B0B0B"/>
+          <a:srgbClr val="0E2238"/>
         </a:solidFill>
       </p:bgPr>
     </p:bg>
@@ -2796,106 +2796,30 @@
           <a:chExt cx="0" cy="0"/>
         </a:xfrm>
       </p:grpSpPr>
-      <p:sp>
-        <p:nvSpPr>
-          <p:cNvPr id="2" name="Shape 0"/>
-          <p:cNvSpPr/>
-          <p:nvPr/>
-        </p:nvSpPr>
-        <p:spPr>
-          <a:xfrm>
-            <a:off x="8394192" y="4626864"/>
-            <a:ext cx="384048" cy="384048"/>
-          </a:xfrm>
-          <a:prstGeom prst="rect">
-            <a:avLst/>
-          </a:prstGeom>
-          <a:solidFill>
-            <a:srgbClr val="0B0B0B"/>
-          </a:solidFill>
-          <a:ln w="9525">
-            <a:solidFill>
-              <a:srgbClr val="B08D57"/>
-            </a:solidFill>
-            <a:prstDash val="solid"/>
-          </a:ln>
-        </p:spPr>
-      </p:sp>
-      <p:sp>
-        <p:nvSpPr>
-          <p:cNvPr id="3" name="Text 1"/>
-          <p:cNvSpPr/>
-          <p:nvPr/>
-        </p:nvSpPr>
-        <p:spPr>
-          <a:xfrm>
-            <a:off x="8394192" y="4626864"/>
-            <a:ext cx="384048" cy="384048"/>
-          </a:xfrm>
-          <a:prstGeom prst="rect">
-            <a:avLst/>
-          </a:prstGeom>
-          <a:noFill/>
-          <a:ln/>
-        </p:spPr>
-        <p:txBody>
-          <a:bodyPr wrap="square" lIns="0" tIns="0" rIns="0" bIns="0" rtlCol="0" anchor="ctr"/>
-          <a:lstStyle/>
-          <a:p>
-            <a:pPr algn="ctr" indent="0" marL="0">
-              <a:buNone/>
-            </a:pPr>
-            <a:r>
-              <a:rPr lang="en-US" sz="1000" b="1" dirty="0">
-                <a:solidFill>
-                  <a:srgbClr val="B08D57"/>
-                </a:solidFill>
-                <a:latin typeface="Cambria" pitchFamily="34" charset="0"/>
-                <a:ea typeface="Cambria" pitchFamily="34" charset="-122"/>
-                <a:cs typeface="Cambria" pitchFamily="34" charset="-120"/>
-              </a:rPr>
-              <a:t>RK</a:t>
-            </a:r>
-            <a:endParaRPr lang="en-US" sz="1000" dirty="0"/>
-          </a:p>
-        </p:txBody>
-      </p:sp>
-      <p:sp>
-        <p:nvSpPr>
-          <p:cNvPr id="4" name="Text 2"/>
-          <p:cNvSpPr/>
-          <p:nvPr/>
-        </p:nvSpPr>
-        <p:spPr>
-          <a:xfrm>
-            <a:off x="3200400" y="4626864"/>
-            <a:ext cx="5120640" cy="384048"/>
-          </a:xfrm>
-          <a:prstGeom prst="rect">
-            <a:avLst/>
-          </a:prstGeom>
-          <a:noFill/>
-          <a:ln/>
-        </p:spPr>
-        <p:txBody>
-          <a:bodyPr wrap="square" lIns="0" tIns="0" rIns="0" bIns="0" rtlCol="0" anchor="ctr"/>
-          <a:lstStyle/>
-          <a:p>
-            <a:pPr algn="r" indent="0" marL="0">
-              <a:buNone/>
-            </a:pPr>
-            <a:r>
-              <a:rPr lang="en-US" sz="900" dirty="0">
-                <a:solidFill>
-                  <a:srgbClr val="D8C39A"/>
-                </a:solidFill>
-              </a:rPr>
-              <a:t>راشد الكيتوب للمحاماة والاستشارات القانونية</a:t>
-            </a:r>
-            <a:endParaRPr lang="en-US" sz="900" dirty="0"/>
-          </a:p>
-        </p:txBody>
-      </p:sp>
+      <p:pic>
+        <p:nvPicPr>
+          <p:cNvPr id="2" name="Image 0" descr="/tmp/claude-0/-home-user-aa/b81485da-2e22-5d10-878f-01904e6d5dc6/scratchpad/rk/logo_dark.png">    </p:cNvPr>
+          <p:cNvPicPr>
+            <a:picLocks noChangeAspect="1"/>
+          </p:cNvPicPr>
+          <p:nvPr/>
+        </p:nvPicPr>
+        <p:blipFill>
+          <a:blip r:embed="rId1"/>
+          <a:stretch>
+            <a:fillRect/>
+          </a:stretch>
+        </p:blipFill>
+        <p:spPr>
+          <a:xfrm>
+            <a:off x="7102823" y="4681728"/>
+            <a:ext cx="1675417" cy="274320"/>
+          </a:xfrm>
+          <a:prstGeom prst="rect">
+            <a:avLst/>
+          </a:prstGeom>
+        </p:spPr>
+      </p:pic>
       <p:sp>
         <p:nvSpPr>
           <p:cNvPr id="25" name="Slide Number Placeholder 0"/>
@@ -2926,7 +2850,7 @@
             <a:lvl1pPr>
               <a:defRPr sz="900">
                 <a:solidFill>
-                  <a:srgbClr val="D8C39A"/>
+                  <a:srgbClr val="D9B38C"/>
                 </a:solidFill>
               </a:defRPr>
             </a:lvl1pPr>
@@ -2973,118 +2897,42 @@
           <a:chExt cx="0" cy="0"/>
         </a:xfrm>
       </p:grpSpPr>
-      <p:sp>
-        <p:nvSpPr>
-          <p:cNvPr id="2" name="Shape 0"/>
-          <p:cNvSpPr/>
-          <p:nvPr/>
-        </p:nvSpPr>
-        <p:spPr>
-          <a:xfrm>
-            <a:off x="8394192" y="4626864"/>
-            <a:ext cx="384048" cy="384048"/>
-          </a:xfrm>
-          <a:prstGeom prst="rect">
-            <a:avLst/>
-          </a:prstGeom>
-          <a:solidFill>
-            <a:srgbClr val="FFFFFF"/>
-          </a:solidFill>
-          <a:ln w="9525">
-            <a:solidFill>
-              <a:srgbClr val="B08D57"/>
-            </a:solidFill>
-            <a:prstDash val="solid"/>
-          </a:ln>
-        </p:spPr>
-      </p:sp>
-      <p:sp>
-        <p:nvSpPr>
-          <p:cNvPr id="3" name="Text 1"/>
-          <p:cNvSpPr/>
-          <p:nvPr/>
-        </p:nvSpPr>
-        <p:spPr>
-          <a:xfrm>
-            <a:off x="8394192" y="4626864"/>
-            <a:ext cx="384048" cy="384048"/>
-          </a:xfrm>
-          <a:prstGeom prst="rect">
-            <a:avLst/>
-          </a:prstGeom>
-          <a:noFill/>
-          <a:ln/>
-        </p:spPr>
-        <p:txBody>
-          <a:bodyPr wrap="square" lIns="0" tIns="0" rIns="0" bIns="0" rtlCol="0" anchor="ctr"/>
-          <a:lstStyle/>
-          <a:p>
-            <a:pPr algn="ctr" indent="0" marL="0">
-              <a:buNone/>
-            </a:pPr>
-            <a:r>
-              <a:rPr lang="en-US" sz="1000" b="1" dirty="0">
-                <a:solidFill>
-                  <a:srgbClr val="B08D57"/>
-                </a:solidFill>
-                <a:latin typeface="Cambria" pitchFamily="34" charset="0"/>
-                <a:ea typeface="Cambria" pitchFamily="34" charset="-122"/>
-                <a:cs typeface="Cambria" pitchFamily="34" charset="-120"/>
-              </a:rPr>
-              <a:t>RK</a:t>
-            </a:r>
-            <a:endParaRPr lang="en-US" sz="1000" dirty="0"/>
-          </a:p>
-        </p:txBody>
-      </p:sp>
-      <p:sp>
-        <p:nvSpPr>
-          <p:cNvPr id="4" name="Text 2"/>
-          <p:cNvSpPr/>
-          <p:nvPr/>
-        </p:nvSpPr>
-        <p:spPr>
-          <a:xfrm>
-            <a:off x="3200400" y="4626864"/>
-            <a:ext cx="5120640" cy="384048"/>
-          </a:xfrm>
-          <a:prstGeom prst="rect">
-            <a:avLst/>
-          </a:prstGeom>
-          <a:noFill/>
-          <a:ln/>
-        </p:spPr>
-        <p:txBody>
-          <a:bodyPr wrap="square" lIns="0" tIns="0" rIns="0" bIns="0" rtlCol="0" anchor="ctr"/>
-          <a:lstStyle/>
-          <a:p>
-            <a:pPr algn="r" indent="0" marL="0">
-              <a:buNone/>
-            </a:pPr>
-            <a:r>
-              <a:rPr lang="en-US" sz="900" dirty="0">
-                <a:solidFill>
-                  <a:srgbClr val="6B6F76"/>
-                </a:solidFill>
-              </a:rPr>
-              <a:t>راشد الكيتوب للمحاماة والاستشارات القانونية</a:t>
-            </a:r>
-            <a:endParaRPr lang="en-US" sz="900" dirty="0"/>
-          </a:p>
-        </p:txBody>
-      </p:sp>
-      <p:sp>
-        <p:nvSpPr>
-          <p:cNvPr id="5" name="Text 3"/>
+      <p:pic>
+        <p:nvPicPr>
+          <p:cNvPr id="2" name="Image 0" descr="/tmp/claude-0/-home-user-aa/b81485da-2e22-5d10-878f-01904e6d5dc6/scratchpad/rk/logo_light.png">    </p:cNvPr>
+          <p:cNvPicPr>
+            <a:picLocks noChangeAspect="1"/>
+          </p:cNvPicPr>
+          <p:nvPr/>
+        </p:nvPicPr>
+        <p:blipFill>
+          <a:blip r:embed="rId1"/>
+          <a:stretch>
+            <a:fillRect/>
+          </a:stretch>
+        </p:blipFill>
+        <p:spPr>
+          <a:xfrm>
+            <a:off x="7102823" y="4681728"/>
+            <a:ext cx="1675417" cy="274320"/>
+          </a:xfrm>
+          <a:prstGeom prst="rect">
+            <a:avLst/>
+          </a:prstGeom>
+        </p:spPr>
+      </p:pic>
+      <p:sp>
+        <p:nvSpPr>
+          <p:cNvPr id="3" name="Text 0"/>
           <p:cNvSpPr/>
           <p:nvPr>
-            <p:ph idx="103" type="title" hasCustomPrompt="1"/>
+            <p:ph idx="101" type="title" hasCustomPrompt="1"/>
           </p:nvPr>
         </p:nvSpPr>
         <p:spPr>
           <a:xfrm>
-            <a:off x="457200" y="347472"/>
-            <a:ext cx="8229600" cy="685800"/>
+            <a:off x="457200" y="420624"/>
+            <a:ext cx="8229600" cy="731520"/>
           </a:xfrm>
           <a:prstGeom prst="rect">
             <a:avLst/>
@@ -3099,7 +2947,7 @@
               <a:buNone/>
               <a:defRPr lang="en-US" sz="2600" b="1" dirty="0">
                 <a:solidFill>
-                  <a:srgbClr val="0B0B0B"/>
+                  <a:srgbClr val="0E2238"/>
                 </a:solidFill>
               </a:defRPr>
             </a:lvl1pPr>
@@ -3142,7 +2990,7 @@
             <a:lvl1pPr>
               <a:defRPr sz="900">
                 <a:solidFill>
-                  <a:srgbClr val="6B6F76"/>
+                  <a:srgbClr val="6E7B88"/>
                 </a:solidFill>
               </a:defRPr>
             </a:lvl1pPr>
@@ -3171,7 +3019,7 @@
     <p:bg>
       <p:bgPr>
         <a:solidFill>
-          <a:srgbClr val="0B0B0B"/>
+          <a:srgbClr val="0E2238"/>
         </a:solidFill>
       </p:bgPr>
     </p:bg>
@@ -3244,7 +3092,7 @@
             <a:lvl1pPr>
               <a:defRPr sz="900">
                 <a:solidFill>
-                  <a:srgbClr val="D8C39A"/>
+                  <a:srgbClr val="D9B38C"/>
                 </a:solidFill>
               </a:defRPr>
             </a:lvl1pPr>
@@ -3555,47 +3403,46 @@
           </a:prstGeom>
           <a:ln w="9525">
             <a:solidFill>
-              <a:srgbClr val="B08D57"/>
+              <a:srgbClr val="B5723B"/>
             </a:solidFill>
             <a:prstDash val="solid"/>
           </a:ln>
         </p:spPr>
       </p:sp>
-      <p:sp>
-        <p:nvSpPr>
-          <p:cNvPr id="3" name="Shape 1"/>
-          <p:cNvSpPr/>
-          <p:nvPr/>
-        </p:nvSpPr>
-        <p:spPr>
-          <a:xfrm>
-            <a:off x="7452360" y="868680"/>
-            <a:ext cx="822960" cy="822960"/>
-          </a:xfrm>
-          <a:prstGeom prst="rect">
-            <a:avLst/>
-          </a:prstGeom>
-          <a:solidFill>
-            <a:srgbClr val="0B0B0B"/>
-          </a:solidFill>
-          <a:ln w="12700">
-            <a:solidFill>
-              <a:srgbClr val="B08D57"/>
-            </a:solidFill>
-            <a:prstDash val="solid"/>
-          </a:ln>
-        </p:spPr>
-      </p:sp>
-      <p:sp>
-        <p:nvSpPr>
-          <p:cNvPr id="4" name="Text 2"/>
+      <p:pic>
+        <p:nvPicPr>
+          <p:cNvPr id="3" name="Image 0" descr="/tmp/claude-0/-home-user-aa/b81485da-2e22-5d10-878f-01904e6d5dc6/scratchpad/rk/logo_dark.png">    </p:cNvPr>
+          <p:cNvPicPr>
+            <a:picLocks noChangeAspect="1"/>
+          </p:cNvPicPr>
+          <p:nvPr/>
+        </p:nvPicPr>
+        <p:blipFill>
+          <a:blip r:embed="rId1"/>
+          <a:stretch>
+            <a:fillRect/>
+          </a:stretch>
+        </p:blipFill>
+        <p:spPr>
+          <a:xfrm>
+            <a:off x="4254320" y="868680"/>
+            <a:ext cx="4021000" cy="658368"/>
+          </a:xfrm>
+          <a:prstGeom prst="rect">
+            <a:avLst/>
+          </a:prstGeom>
+        </p:spPr>
+      </p:pic>
+      <p:sp>
+        <p:nvSpPr>
+          <p:cNvPr id="4" name="Text 1"/>
           <p:cNvSpPr txBox="1"/>
           <p:nvPr/>
         </p:nvSpPr>
         <p:spPr>
           <a:xfrm>
-            <a:off x="7452360" y="868680"/>
-            <a:ext cx="822960" cy="822960"/>
+            <a:off x="868680" y="1965960"/>
+            <a:ext cx="7406640" cy="1371600"/>
           </a:xfrm>
           <a:prstGeom prst="rect">
             <a:avLst/>
@@ -3607,93 +3454,18 @@
           <a:bodyPr wrap="square" lIns="0" tIns="0" rIns="0" bIns="0" rtlCol="0" anchor="ctr"/>
           <a:lstStyle/>
           <a:p>
-            <a:pPr algn="ctr" indent="0" marL="0">
-              <a:buNone/>
-            </a:pPr>
-            <a:r>
-              <a:rPr lang="en-US" sz="2400" b="1" dirty="0">
-                <a:solidFill>
-                  <a:schemeClr val="accent1"/>
+            <a:pPr rtl="1" algn="r" indent="0" marL="0">
+              <a:buNone/>
+            </a:pPr>
+            <a:r>
+              <a:rPr lang="ar-AE" altLang="en-US" sz="3400" b="1" dirty="0">
+                <a:solidFill>
+                  <a:schemeClr val="bg1"/>
                 </a:solidFill>
                 <a:latin typeface="Cambria" pitchFamily="34" charset="0"/>
                 <a:ea typeface="Cambria" pitchFamily="34" charset="-122"/>
                 <a:cs typeface="Cambria" pitchFamily="34" charset="-120"/>
               </a:rPr>
-              <a:t>RK</a:t>
-            </a:r>
-            <a:endParaRPr lang="en-US" sz="2400" dirty="0"/>
-          </a:p>
-        </p:txBody>
-      </p:sp>
-      <p:sp>
-        <p:nvSpPr>
-          <p:cNvPr id="5" name="Text 3"/>
-          <p:cNvSpPr txBox="1"/>
-          <p:nvPr/>
-        </p:nvSpPr>
-        <p:spPr>
-          <a:xfrm>
-            <a:off x="1325880" y="868680"/>
-            <a:ext cx="5943600" cy="822960"/>
-          </a:xfrm>
-          <a:prstGeom prst="rect">
-            <a:avLst/>
-          </a:prstGeom>
-          <a:noFill/>
-          <a:ln/>
-        </p:spPr>
-        <p:txBody>
-          <a:bodyPr wrap="square" lIns="0" tIns="0" rIns="0" bIns="0" rtlCol="0" anchor="ctr"/>
-          <a:lstStyle/>
-          <a:p>
-            <a:pPr rtl="1" algn="r" indent="0" marL="0">
-              <a:buNone/>
-            </a:pPr>
-            <a:r>
-              <a:rPr lang="ar-AE" altLang="en-US" sz="1200" dirty="0">
-                <a:solidFill>
-                  <a:schemeClr val="accent2"/>
-                </a:solidFill>
-              </a:rPr>
-              <a:t>راشد الكيتوب للمحاماة والاستشارات القانونية</a:t>
-            </a:r>
-            <a:endParaRPr lang="ar-AE" sz="1200" dirty="0"/>
-          </a:p>
-        </p:txBody>
-      </p:sp>
-      <p:sp>
-        <p:nvSpPr>
-          <p:cNvPr id="6" name="Text 4"/>
-          <p:cNvSpPr txBox="1"/>
-          <p:nvPr/>
-        </p:nvSpPr>
-        <p:spPr>
-          <a:xfrm>
-            <a:off x="868680" y="1965960"/>
-            <a:ext cx="7406640" cy="1371600"/>
-          </a:xfrm>
-          <a:prstGeom prst="rect">
-            <a:avLst/>
-          </a:prstGeom>
-          <a:noFill/>
-          <a:ln/>
-        </p:spPr>
-        <p:txBody>
-          <a:bodyPr wrap="square" lIns="0" tIns="0" rIns="0" bIns="0" rtlCol="0" anchor="ctr"/>
-          <a:lstStyle/>
-          <a:p>
-            <a:pPr rtl="1" algn="r" indent="0" marL="0">
-              <a:buNone/>
-            </a:pPr>
-            <a:r>
-              <a:rPr lang="ar-AE" altLang="en-US" sz="3400" b="1" dirty="0">
-                <a:solidFill>
-                  <a:schemeClr val="bg1"/>
-                </a:solidFill>
-                <a:latin typeface="Cambria" pitchFamily="34" charset="0"/>
-                <a:ea typeface="Cambria" pitchFamily="34" charset="-122"/>
-                <a:cs typeface="Cambria" pitchFamily="34" charset="-120"/>
-              </a:rPr>
               <a:t>استراتيجية خدمة حماية الأصول والوصايا</a:t>
             </a:r>
             <a:endParaRPr lang="ar-AE" sz="3400" dirty="0"/>
@@ -3702,7 +3474,7 @@
       </p:sp>
       <p:sp>
         <p:nvSpPr>
-          <p:cNvPr id="7" name="Text 5"/>
+          <p:cNvPr id="5" name="Text 2"/>
           <p:cNvSpPr txBox="1"/>
           <p:nvPr/>
         </p:nvSpPr>
@@ -3738,7 +3510,7 @@
       </p:sp>
       <p:sp>
         <p:nvSpPr>
-          <p:cNvPr id="8" name="Text 6"/>
+          <p:cNvPr id="6" name="Text 3"/>
           <p:cNvSpPr txBox="1"/>
           <p:nvPr/>
         </p:nvSpPr>
@@ -3802,7 +3574,7 @@
             <a:lvl1pPr>
               <a:defRPr sz="900">
                 <a:solidFill>
-                  <a:srgbClr val="D8C39A"/>
+                  <a:srgbClr val="D9B38C"/>
                 </a:solidFill>
               </a:defRPr>
             </a:lvl1pPr>
@@ -3889,17 +3661,17 @@
         </p:nvSpPr>
         <p:spPr>
           <a:xfrm>
-            <a:off x="914400" y="2834640"/>
-            <a:ext cx="7772400" cy="731520"/>
-          </a:xfrm>
-          <a:prstGeom prst="rect">
-            <a:avLst/>
-          </a:prstGeom>
-          <a:noFill/>
-          <a:ln/>
-        </p:spPr>
-        <p:txBody>
-          <a:bodyPr wrap="square" lIns="0" tIns="0" rIns="0" bIns="0" rtlCol="0" anchor="t"/>
+            <a:off x="914400" y="2743200"/>
+            <a:ext cx="7772400" cy="868680"/>
+          </a:xfrm>
+          <a:prstGeom prst="rect">
+            <a:avLst/>
+          </a:prstGeom>
+          <a:noFill/>
+          <a:ln/>
+        </p:spPr>
+        <p:txBody>
+          <a:bodyPr wrap="square" lIns="0" tIns="0" rIns="0" bIns="0" rtlCol="0" anchor="b"/>
           <a:lstStyle/>
           <a:p>
             <a:pPr rtl="1" algn="r" indent="0" marL="0">
@@ -3928,17 +3700,17 @@
         </p:nvSpPr>
         <p:spPr>
           <a:xfrm>
-            <a:off x="914400" y="3566160"/>
-            <a:ext cx="7772400" cy="548640"/>
-          </a:xfrm>
-          <a:prstGeom prst="rect">
-            <a:avLst/>
-          </a:prstGeom>
-          <a:noFill/>
-          <a:ln/>
-        </p:spPr>
-        <p:txBody>
-          <a:bodyPr wrap="square" lIns="0" tIns="0" rIns="0" bIns="0" rtlCol="0" anchor="ctr"/>
+            <a:off x="914400" y="3675888"/>
+            <a:ext cx="7772400" cy="502920"/>
+          </a:xfrm>
+          <a:prstGeom prst="rect">
+            <a:avLst/>
+          </a:prstGeom>
+          <a:noFill/>
+          <a:ln/>
+        </p:spPr>
+        <p:txBody>
+          <a:bodyPr wrap="square" lIns="0" tIns="0" rIns="0" bIns="0" rtlCol="0" anchor="t"/>
           <a:lstStyle/>
           <a:p>
             <a:pPr rtl="1" algn="r" indent="0" marL="0">
@@ -3986,7 +3758,7 @@
             <a:lvl1pPr>
               <a:defRPr sz="900">
                 <a:solidFill>
-                  <a:srgbClr val="D8C39A"/>
+                  <a:srgbClr val="D9B38C"/>
                 </a:solidFill>
               </a:defRPr>
             </a:lvl1pPr>
@@ -4028,39 +3800,40 @@
       </p:grpSpPr>
       <p:sp>
         <p:nvSpPr>
-          <p:cNvPr id="2" name="Text 3"/>
-          <p:cNvSpPr/>
-          <p:nvPr>
-            <p:ph idx="103" type="title" hasCustomPrompt="1"/>
-          </p:nvPr>
-        </p:nvSpPr>
-        <p:spPr>
-          <a:xfrm>
-            <a:off x="457200" y="347472"/>
-            <a:ext cx="8229600" cy="685800"/>
-          </a:xfrm>
-          <a:prstGeom prst="rect">
-            <a:avLst/>
-          </a:prstGeom>
-          <a:noFill/>
-          <a:ln/>
-        </p:spPr>
-        <p:txBody>
-          <a:bodyPr wrap="square" lIns="0" tIns="0" rIns="0" bIns="0" rtlCol="0" anchor="ctr"/>
+          <p:cNvPr id="2" name="Text 0"/>
+          <p:cNvSpPr txBox="1"/>
+          <p:nvPr/>
+        </p:nvSpPr>
+        <p:spPr>
+          <a:xfrm>
+            <a:off x="457200" y="402336"/>
+            <a:ext cx="8229600" cy="749808"/>
+          </a:xfrm>
+          <a:prstGeom prst="rect">
+            <a:avLst/>
+          </a:prstGeom>
+          <a:noFill/>
+          <a:ln/>
+        </p:spPr>
+        <p:txBody>
+          <a:bodyPr wrap="square" lIns="0" tIns="0" rIns="0" bIns="0" rtlCol="0" anchor="t"/>
           <a:lstStyle/>
           <a:p>
             <a:pPr rtl="1" algn="r" indent="0" marL="0">
               <a:buNone/>
             </a:pPr>
             <a:r>
-              <a:rPr lang="en-US" sz="2600" b="1" dirty="0">
-                <a:solidFill>
-                  <a:srgbClr val="0B0B0B"/>
-                </a:solidFill>
+              <a:rPr lang="ar-AE" altLang="en-US" sz="2600" b="1" dirty="0">
+                <a:solidFill>
+                  <a:schemeClr val="tx1"/>
+                </a:solidFill>
+                <a:latin typeface="Cambria" pitchFamily="34" charset="0"/>
+                <a:ea typeface="Cambria" pitchFamily="34" charset="-122"/>
+                <a:cs typeface="Cambria" pitchFamily="34" charset="-120"/>
               </a:rPr>
               <a:t>توزيع الأدوار بيننا وبين الشريك</a:t>
             </a:r>
-            <a:endParaRPr lang="en-US" sz="2600" dirty="0"/>
+            <a:endParaRPr lang="ar-AE" sz="2600" dirty="0"/>
           </a:p>
         </p:txBody>
       </p:sp>
@@ -4115,11 +3888,11 @@
             <a:avLst/>
           </a:prstGeom>
           <a:solidFill>
-            <a:srgbClr val="0B0B0B"/>
+            <a:srgbClr val="0E2238"/>
           </a:solidFill>
           <a:ln w="12700">
             <a:solidFill>
-              <a:srgbClr val="0B0B0B"/>
+              <a:srgbClr val="0E2238"/>
             </a:solidFill>
             <a:prstDash val="solid"/>
           </a:ln>
@@ -4176,11 +3949,11 @@
             <a:avLst/>
           </a:prstGeom>
           <a:solidFill>
-            <a:srgbClr val="F4F1EA"/>
+            <a:srgbClr val="F4F1EB"/>
           </a:solidFill>
           <a:ln w="12700">
             <a:solidFill>
-              <a:srgbClr val="F4F1EA"/>
+              <a:srgbClr val="F4F1EB"/>
             </a:solidFill>
             <a:prstDash val="solid"/>
           </a:ln>
@@ -4295,11 +4068,11 @@
             <a:avLst/>
           </a:prstGeom>
           <a:solidFill>
-            <a:srgbClr val="B08D57"/>
+            <a:srgbClr val="B5723B"/>
           </a:solidFill>
           <a:ln w="12700">
             <a:solidFill>
-              <a:srgbClr val="B08D57"/>
+              <a:srgbClr val="B5723B"/>
             </a:solidFill>
             <a:prstDash val="solid"/>
           </a:ln>
@@ -4356,11 +4129,11 @@
             <a:avLst/>
           </a:prstGeom>
           <a:solidFill>
-            <a:srgbClr val="F4F1EA"/>
+            <a:srgbClr val="F4F1EB"/>
           </a:solidFill>
           <a:ln w="12700">
             <a:solidFill>
-              <a:srgbClr val="F4F1EA"/>
+              <a:srgbClr val="F4F1EB"/>
             </a:solidFill>
             <a:prstDash val="solid"/>
           </a:ln>
@@ -4457,6 +4230,36 @@
               <a:t>حماية الوسيط من أي مسؤولية قانونية</a:t>
             </a:r>
             <a:endParaRPr lang="ar-AE" sz="1100" dirty="0"/>
+          </a:p>
+        </p:txBody>
+      </p:sp>
+      <p:sp>
+        <p:nvSpPr>
+          <p:cNvPr id="12" name="Text 0"/>
+          <p:cNvSpPr/>
+          <p:nvPr>
+            <p:ph idx="101" type="title" hasCustomPrompt="1"/>
+          </p:nvPr>
+        </p:nvSpPr>
+        <p:spPr>
+          <a:xfrm>
+            <a:off x="457200" y="420624"/>
+            <a:ext cx="8229600" cy="731520"/>
+          </a:xfrm>
+          <a:prstGeom prst="rect">
+            <a:avLst/>
+          </a:prstGeom>
+          <a:noFill/>
+          <a:ln/>
+        </p:spPr>
+        <p:txBody>
+          <a:bodyPr wrap="square" lIns="0" tIns="0" rIns="0" bIns="0" rtlCol="0" anchor="t"/>
+          <a:lstStyle/>
+          <a:p>
+            <a:pPr algn="r" indent="0" marL="0">
+              <a:buNone/>
+            </a:pPr>
+            <a:endParaRPr lang="en-US" sz="2600" dirty="0"/>
           </a:p>
         </p:txBody>
       </p:sp>
@@ -4490,7 +4293,7 @@
             <a:lvl1pPr>
               <a:defRPr sz="900">
                 <a:solidFill>
-                  <a:srgbClr val="6B6F76"/>
+                  <a:srgbClr val="6E7B88"/>
                 </a:solidFill>
               </a:defRPr>
             </a:lvl1pPr>
@@ -4532,39 +4335,40 @@
       </p:grpSpPr>
       <p:sp>
         <p:nvSpPr>
-          <p:cNvPr id="2" name="Text 3"/>
-          <p:cNvSpPr/>
-          <p:nvPr>
-            <p:ph idx="103" type="title" hasCustomPrompt="1"/>
-          </p:nvPr>
-        </p:nvSpPr>
-        <p:spPr>
-          <a:xfrm>
-            <a:off x="457200" y="347472"/>
-            <a:ext cx="8229600" cy="685800"/>
-          </a:xfrm>
-          <a:prstGeom prst="rect">
-            <a:avLst/>
-          </a:prstGeom>
-          <a:noFill/>
-          <a:ln/>
-        </p:spPr>
-        <p:txBody>
-          <a:bodyPr wrap="square" lIns="0" tIns="0" rIns="0" bIns="0" rtlCol="0" anchor="ctr"/>
+          <p:cNvPr id="2" name="Text 0"/>
+          <p:cNvSpPr txBox="1"/>
+          <p:nvPr/>
+        </p:nvSpPr>
+        <p:spPr>
+          <a:xfrm>
+            <a:off x="457200" y="402336"/>
+            <a:ext cx="8229600" cy="749808"/>
+          </a:xfrm>
+          <a:prstGeom prst="rect">
+            <a:avLst/>
+          </a:prstGeom>
+          <a:noFill/>
+          <a:ln/>
+        </p:spPr>
+        <p:txBody>
+          <a:bodyPr wrap="square" lIns="0" tIns="0" rIns="0" bIns="0" rtlCol="0" anchor="t"/>
           <a:lstStyle/>
           <a:p>
             <a:pPr rtl="1" algn="r" indent="0" marL="0">
               <a:buNone/>
             </a:pPr>
             <a:r>
-              <a:rPr lang="en-US" sz="2600" b="1" dirty="0">
-                <a:solidFill>
-                  <a:srgbClr val="0B0B0B"/>
-                </a:solidFill>
+              <a:rPr lang="ar-AE" altLang="en-US" sz="2600" b="1" dirty="0">
+                <a:solidFill>
+                  <a:schemeClr val="tx1"/>
+                </a:solidFill>
+                <a:latin typeface="Cambria" pitchFamily="34" charset="0"/>
+                <a:ea typeface="Cambria" pitchFamily="34" charset="-122"/>
+                <a:cs typeface="Cambria" pitchFamily="34" charset="-120"/>
               </a:rPr>
               <a:t>اتفاقية الإحالة والتعاون</a:t>
             </a:r>
-            <a:endParaRPr lang="en-US" sz="2600" dirty="0"/>
+            <a:endParaRPr lang="ar-AE" sz="2600" dirty="0"/>
           </a:p>
         </p:txBody>
       </p:sp>
@@ -4619,11 +4423,11 @@
             <a:avLst/>
           </a:prstGeom>
           <a:solidFill>
-            <a:srgbClr val="F4F1EA"/>
+            <a:srgbClr val="F4F1EB"/>
           </a:solidFill>
           <a:ln w="12700">
             <a:solidFill>
-              <a:srgbClr val="F4F1EA"/>
+              <a:srgbClr val="F4F1EB"/>
             </a:solidFill>
             <a:prstDash val="solid"/>
           </a:ln>
@@ -4724,11 +4528,11 @@
             <a:avLst/>
           </a:prstGeom>
           <a:solidFill>
-            <a:srgbClr val="F4F1EA"/>
+            <a:srgbClr val="F4F1EB"/>
           </a:solidFill>
           <a:ln w="12700">
             <a:solidFill>
-              <a:srgbClr val="F4F1EA"/>
+              <a:srgbClr val="F4F1EB"/>
             </a:solidFill>
             <a:prstDash val="solid"/>
           </a:ln>
@@ -4829,11 +4633,11 @@
             <a:avLst/>
           </a:prstGeom>
           <a:solidFill>
-            <a:srgbClr val="F4F1EA"/>
+            <a:srgbClr val="F4F1EB"/>
           </a:solidFill>
           <a:ln w="12700">
             <a:solidFill>
-              <a:srgbClr val="F4F1EA"/>
+              <a:srgbClr val="F4F1EB"/>
             </a:solidFill>
             <a:prstDash val="solid"/>
           </a:ln>
@@ -4934,11 +4738,11 @@
             <a:avLst/>
           </a:prstGeom>
           <a:solidFill>
-            <a:srgbClr val="F4F1EA"/>
+            <a:srgbClr val="F4F1EB"/>
           </a:solidFill>
           <a:ln w="12700">
             <a:solidFill>
-              <a:srgbClr val="F4F1EA"/>
+              <a:srgbClr val="F4F1EB"/>
             </a:solidFill>
             <a:prstDash val="solid"/>
           </a:ln>
@@ -5039,11 +4843,11 @@
             <a:avLst/>
           </a:prstGeom>
           <a:solidFill>
-            <a:srgbClr val="F4F1EA"/>
+            <a:srgbClr val="F4F1EB"/>
           </a:solidFill>
           <a:ln w="12700">
             <a:solidFill>
-              <a:srgbClr val="F4F1EA"/>
+              <a:srgbClr val="F4F1EB"/>
             </a:solidFill>
             <a:prstDash val="solid"/>
           </a:ln>
@@ -5131,6 +4935,36 @@
       </p:sp>
       <p:sp>
         <p:nvSpPr>
+          <p:cNvPr id="19" name="Text 0"/>
+          <p:cNvSpPr/>
+          <p:nvPr>
+            <p:ph idx="101" type="title" hasCustomPrompt="1"/>
+          </p:nvPr>
+        </p:nvSpPr>
+        <p:spPr>
+          <a:xfrm>
+            <a:off x="457200" y="420624"/>
+            <a:ext cx="8229600" cy="731520"/>
+          </a:xfrm>
+          <a:prstGeom prst="rect">
+            <a:avLst/>
+          </a:prstGeom>
+          <a:noFill/>
+          <a:ln/>
+        </p:spPr>
+        <p:txBody>
+          <a:bodyPr wrap="square" lIns="0" tIns="0" rIns="0" bIns="0" rtlCol="0" anchor="t"/>
+          <a:lstStyle/>
+          <a:p>
+            <a:pPr algn="r" indent="0" marL="0">
+              <a:buNone/>
+            </a:pPr>
+            <a:endParaRPr lang="en-US" sz="2600" dirty="0"/>
+          </a:p>
+        </p:txBody>
+      </p:sp>
+      <p:sp>
+        <p:nvSpPr>
           <p:cNvPr id="25" name="Slide Number Placeholder 0"/>
           <p:cNvSpPr>
             <a:spLocks noGrp="1"/>
@@ -5159,7 +4993,7 @@
             <a:lvl1pPr>
               <a:defRPr sz="900">
                 <a:solidFill>
-                  <a:srgbClr val="6B6F76"/>
+                  <a:srgbClr val="6E7B88"/>
                 </a:solidFill>
               </a:defRPr>
             </a:lvl1pPr>
@@ -5246,17 +5080,17 @@
         </p:nvSpPr>
         <p:spPr>
           <a:xfrm>
-            <a:off x="914400" y="2834640"/>
-            <a:ext cx="7772400" cy="731520"/>
-          </a:xfrm>
-          <a:prstGeom prst="rect">
-            <a:avLst/>
-          </a:prstGeom>
-          <a:noFill/>
-          <a:ln/>
-        </p:spPr>
-        <p:txBody>
-          <a:bodyPr wrap="square" lIns="0" tIns="0" rIns="0" bIns="0" rtlCol="0" anchor="t"/>
+            <a:off x="914400" y="2743200"/>
+            <a:ext cx="7772400" cy="868680"/>
+          </a:xfrm>
+          <a:prstGeom prst="rect">
+            <a:avLst/>
+          </a:prstGeom>
+          <a:noFill/>
+          <a:ln/>
+        </p:spPr>
+        <p:txBody>
+          <a:bodyPr wrap="square" lIns="0" tIns="0" rIns="0" bIns="0" rtlCol="0" anchor="b"/>
           <a:lstStyle/>
           <a:p>
             <a:pPr rtl="1" algn="r" indent="0" marL="0">
@@ -5285,17 +5119,17 @@
         </p:nvSpPr>
         <p:spPr>
           <a:xfrm>
-            <a:off x="914400" y="3566160"/>
-            <a:ext cx="7772400" cy="548640"/>
-          </a:xfrm>
-          <a:prstGeom prst="rect">
-            <a:avLst/>
-          </a:prstGeom>
-          <a:noFill/>
-          <a:ln/>
-        </p:spPr>
-        <p:txBody>
-          <a:bodyPr wrap="square" lIns="0" tIns="0" rIns="0" bIns="0" rtlCol="0" anchor="ctr"/>
+            <a:off x="914400" y="3675888"/>
+            <a:ext cx="7772400" cy="502920"/>
+          </a:xfrm>
+          <a:prstGeom prst="rect">
+            <a:avLst/>
+          </a:prstGeom>
+          <a:noFill/>
+          <a:ln/>
+        </p:spPr>
+        <p:txBody>
+          <a:bodyPr wrap="square" lIns="0" tIns="0" rIns="0" bIns="0" rtlCol="0" anchor="t"/>
           <a:lstStyle/>
           <a:p>
             <a:pPr rtl="1" algn="r" indent="0" marL="0">
@@ -5343,7 +5177,7 @@
             <a:lvl1pPr>
               <a:defRPr sz="900">
                 <a:solidFill>
-                  <a:srgbClr val="D8C39A"/>
+                  <a:srgbClr val="D9B38C"/>
                 </a:solidFill>
               </a:defRPr>
             </a:lvl1pPr>
@@ -5385,39 +5219,40 @@
       </p:grpSpPr>
       <p:sp>
         <p:nvSpPr>
-          <p:cNvPr id="2" name="Text 3"/>
-          <p:cNvSpPr/>
-          <p:nvPr>
-            <p:ph idx="103" type="title" hasCustomPrompt="1"/>
-          </p:nvPr>
-        </p:nvSpPr>
-        <p:spPr>
-          <a:xfrm>
-            <a:off x="457200" y="347472"/>
-            <a:ext cx="8229600" cy="685800"/>
-          </a:xfrm>
-          <a:prstGeom prst="rect">
-            <a:avLst/>
-          </a:prstGeom>
-          <a:noFill/>
-          <a:ln/>
-        </p:spPr>
-        <p:txBody>
-          <a:bodyPr wrap="square" lIns="0" tIns="0" rIns="0" bIns="0" rtlCol="0" anchor="ctr"/>
+          <p:cNvPr id="2" name="Text 0"/>
+          <p:cNvSpPr txBox="1"/>
+          <p:nvPr/>
+        </p:nvSpPr>
+        <p:spPr>
+          <a:xfrm>
+            <a:off x="457200" y="402336"/>
+            <a:ext cx="8229600" cy="749808"/>
+          </a:xfrm>
+          <a:prstGeom prst="rect">
+            <a:avLst/>
+          </a:prstGeom>
+          <a:noFill/>
+          <a:ln/>
+        </p:spPr>
+        <p:txBody>
+          <a:bodyPr wrap="square" lIns="0" tIns="0" rIns="0" bIns="0" rtlCol="0" anchor="t"/>
           <a:lstStyle/>
           <a:p>
             <a:pPr rtl="1" algn="r" indent="0" marL="0">
               <a:buNone/>
             </a:pPr>
             <a:r>
-              <a:rPr lang="en-US" sz="2600" b="1" dirty="0">
-                <a:solidFill>
-                  <a:srgbClr val="0B0B0B"/>
-                </a:solidFill>
+              <a:rPr lang="ar-AE" altLang="en-US" sz="2600" b="1" dirty="0">
+                <a:solidFill>
+                  <a:schemeClr val="tx1"/>
+                </a:solidFill>
+                <a:latin typeface="Cambria" pitchFamily="34" charset="0"/>
+                <a:ea typeface="Cambria" pitchFamily="34" charset="-122"/>
+                <a:cs typeface="Cambria" pitchFamily="34" charset="-120"/>
               </a:rPr>
               <a:t>المرحلة الأولى: مع شركة الوساطة</a:t>
             </a:r>
-            <a:endParaRPr lang="en-US" sz="2600" dirty="0"/>
+            <a:endParaRPr lang="ar-AE" sz="2600" dirty="0"/>
           </a:p>
         </p:txBody>
       </p:sp>
@@ -5474,7 +5309,7 @@
           <a:noFill/>
           <a:ln w="9525">
             <a:solidFill>
-              <a:srgbClr val="D8C39A"/>
+              <a:srgbClr val="D9B38C"/>
             </a:solidFill>
             <a:prstDash val="solid"/>
           </a:ln>
@@ -5495,11 +5330,11 @@
             <a:avLst/>
           </a:prstGeom>
           <a:solidFill>
-            <a:srgbClr val="0B0B0B"/>
+            <a:srgbClr val="0E2238"/>
           </a:solidFill>
           <a:ln w="12700">
             <a:solidFill>
-              <a:srgbClr val="B08D57"/>
+              <a:srgbClr val="B5723B"/>
             </a:solidFill>
             <a:prstDash val="solid"/>
           </a:ln>
@@ -5631,11 +5466,11 @@
             <a:avLst/>
           </a:prstGeom>
           <a:solidFill>
-            <a:srgbClr val="0B0B0B"/>
+            <a:srgbClr val="0E2238"/>
           </a:solidFill>
           <a:ln w="12700">
             <a:solidFill>
-              <a:srgbClr val="B08D57"/>
+              <a:srgbClr val="B5723B"/>
             </a:solidFill>
             <a:prstDash val="solid"/>
           </a:ln>
@@ -5767,11 +5602,11 @@
             <a:avLst/>
           </a:prstGeom>
           <a:solidFill>
-            <a:srgbClr val="0B0B0B"/>
+            <a:srgbClr val="0E2238"/>
           </a:solidFill>
           <a:ln w="12700">
             <a:solidFill>
-              <a:srgbClr val="B08D57"/>
+              <a:srgbClr val="B5723B"/>
             </a:solidFill>
             <a:prstDash val="solid"/>
           </a:ln>
@@ -5903,11 +5738,11 @@
             <a:avLst/>
           </a:prstGeom>
           <a:solidFill>
-            <a:srgbClr val="0B0B0B"/>
+            <a:srgbClr val="0E2238"/>
           </a:solidFill>
           <a:ln w="12700">
             <a:solidFill>
-              <a:srgbClr val="B08D57"/>
+              <a:srgbClr val="B5723B"/>
             </a:solidFill>
             <a:prstDash val="solid"/>
           </a:ln>
@@ -6021,6 +5856,36 @@
               <a:t>ندوة مجانية لفريق المبيعات، واستشارة مجانية أولى لعملائهم، ومواد تسويقية جاهزة.</a:t>
             </a:r>
             <a:endParaRPr lang="ar-AE" sz="1050" dirty="0"/>
+          </a:p>
+        </p:txBody>
+      </p:sp>
+      <p:sp>
+        <p:nvSpPr>
+          <p:cNvPr id="21" name="Text 0"/>
+          <p:cNvSpPr/>
+          <p:nvPr>
+            <p:ph idx="101" type="title" hasCustomPrompt="1"/>
+          </p:nvPr>
+        </p:nvSpPr>
+        <p:spPr>
+          <a:xfrm>
+            <a:off x="457200" y="420624"/>
+            <a:ext cx="8229600" cy="731520"/>
+          </a:xfrm>
+          <a:prstGeom prst="rect">
+            <a:avLst/>
+          </a:prstGeom>
+          <a:noFill/>
+          <a:ln/>
+        </p:spPr>
+        <p:txBody>
+          <a:bodyPr wrap="square" lIns="0" tIns="0" rIns="0" bIns="0" rtlCol="0" anchor="t"/>
+          <a:lstStyle/>
+          <a:p>
+            <a:pPr algn="r" indent="0" marL="0">
+              <a:buNone/>
+            </a:pPr>
+            <a:endParaRPr lang="en-US" sz="2600" dirty="0"/>
           </a:p>
         </p:txBody>
       </p:sp>
@@ -6054,7 +5919,7 @@
             <a:lvl1pPr>
               <a:defRPr sz="900">
                 <a:solidFill>
-                  <a:srgbClr val="6B6F76"/>
+                  <a:srgbClr val="6E7B88"/>
                 </a:solidFill>
               </a:defRPr>
             </a:lvl1pPr>
@@ -6096,39 +5961,40 @@
       </p:grpSpPr>
       <p:sp>
         <p:nvSpPr>
-          <p:cNvPr id="2" name="Text 3"/>
-          <p:cNvSpPr/>
-          <p:nvPr>
-            <p:ph idx="103" type="title" hasCustomPrompt="1"/>
-          </p:nvPr>
-        </p:nvSpPr>
-        <p:spPr>
-          <a:xfrm>
-            <a:off x="457200" y="347472"/>
-            <a:ext cx="8229600" cy="685800"/>
-          </a:xfrm>
-          <a:prstGeom prst="rect">
-            <a:avLst/>
-          </a:prstGeom>
-          <a:noFill/>
-          <a:ln/>
-        </p:spPr>
-        <p:txBody>
-          <a:bodyPr wrap="square" lIns="0" tIns="0" rIns="0" bIns="0" rtlCol="0" anchor="ctr"/>
+          <p:cNvPr id="2" name="Text 0"/>
+          <p:cNvSpPr txBox="1"/>
+          <p:nvPr/>
+        </p:nvSpPr>
+        <p:spPr>
+          <a:xfrm>
+            <a:off x="457200" y="402336"/>
+            <a:ext cx="8229600" cy="749808"/>
+          </a:xfrm>
+          <a:prstGeom prst="rect">
+            <a:avLst/>
+          </a:prstGeom>
+          <a:noFill/>
+          <a:ln/>
+        </p:spPr>
+        <p:txBody>
+          <a:bodyPr wrap="square" lIns="0" tIns="0" rIns="0" bIns="0" rtlCol="0" anchor="t"/>
           <a:lstStyle/>
           <a:p>
             <a:pPr rtl="1" algn="r" indent="0" marL="0">
               <a:buNone/>
             </a:pPr>
             <a:r>
-              <a:rPr lang="en-US" sz="2600" b="1" dirty="0">
-                <a:solidFill>
-                  <a:srgbClr val="0B0B0B"/>
-                </a:solidFill>
+              <a:rPr lang="ar-AE" altLang="en-US" sz="2600" b="1" dirty="0">
+                <a:solidFill>
+                  <a:schemeClr val="tx1"/>
+                </a:solidFill>
+                <a:latin typeface="Cambria" pitchFamily="34" charset="0"/>
+                <a:ea typeface="Cambria" pitchFamily="34" charset="-122"/>
+                <a:cs typeface="Cambria" pitchFamily="34" charset="-120"/>
               </a:rPr>
               <a:t>المرحلة الثانية: بعد تحويل العميل إلينا</a:t>
             </a:r>
-            <a:endParaRPr lang="en-US" sz="2600" dirty="0"/>
+            <a:endParaRPr lang="ar-AE" sz="2600" dirty="0"/>
           </a:p>
         </p:txBody>
       </p:sp>
@@ -6185,7 +6051,7 @@
           <a:noFill/>
           <a:ln w="9525">
             <a:solidFill>
-              <a:srgbClr val="D8C39A"/>
+              <a:srgbClr val="D9B38C"/>
             </a:solidFill>
             <a:prstDash val="solid"/>
           </a:ln>
@@ -6206,11 +6072,11 @@
             <a:avLst/>
           </a:prstGeom>
           <a:solidFill>
-            <a:srgbClr val="0B0B0B"/>
+            <a:srgbClr val="0E2238"/>
           </a:solidFill>
           <a:ln w="12700">
             <a:solidFill>
-              <a:srgbClr val="B08D57"/>
+              <a:srgbClr val="B5723B"/>
             </a:solidFill>
             <a:prstDash val="solid"/>
           </a:ln>
@@ -6342,11 +6208,11 @@
             <a:avLst/>
           </a:prstGeom>
           <a:solidFill>
-            <a:srgbClr val="0B0B0B"/>
+            <a:srgbClr val="0E2238"/>
           </a:solidFill>
           <a:ln w="12700">
             <a:solidFill>
-              <a:srgbClr val="B08D57"/>
+              <a:srgbClr val="B5723B"/>
             </a:solidFill>
             <a:prstDash val="solid"/>
           </a:ln>
@@ -6478,11 +6344,11 @@
             <a:avLst/>
           </a:prstGeom>
           <a:solidFill>
-            <a:srgbClr val="0B0B0B"/>
+            <a:srgbClr val="0E2238"/>
           </a:solidFill>
           <a:ln w="12700">
             <a:solidFill>
-              <a:srgbClr val="B08D57"/>
+              <a:srgbClr val="B5723B"/>
             </a:solidFill>
             <a:prstDash val="solid"/>
           </a:ln>
@@ -6614,11 +6480,11 @@
             <a:avLst/>
           </a:prstGeom>
           <a:solidFill>
-            <a:srgbClr val="0B0B0B"/>
+            <a:srgbClr val="0E2238"/>
           </a:solidFill>
           <a:ln w="12700">
             <a:solidFill>
-              <a:srgbClr val="B08D57"/>
+              <a:srgbClr val="B5723B"/>
             </a:solidFill>
             <a:prstDash val="solid"/>
           </a:ln>
@@ -6750,11 +6616,11 @@
             <a:avLst/>
           </a:prstGeom>
           <a:solidFill>
-            <a:srgbClr val="0B0B0B"/>
+            <a:srgbClr val="0E2238"/>
           </a:solidFill>
           <a:ln w="12700">
             <a:solidFill>
-              <a:srgbClr val="B08D57"/>
+              <a:srgbClr val="B5723B"/>
             </a:solidFill>
             <a:prstDash val="solid"/>
           </a:ln>
@@ -6868,6 +6734,36 @@
               <a:t>بحسب الجهة: محاكم دبي، DIFC، ADGM، أو كاتب العدل.</a:t>
             </a:r>
             <a:endParaRPr lang="ar-AE" sz="1050" dirty="0"/>
+          </a:p>
+        </p:txBody>
+      </p:sp>
+      <p:sp>
+        <p:nvSpPr>
+          <p:cNvPr id="25" name="Text 0"/>
+          <p:cNvSpPr/>
+          <p:nvPr>
+            <p:ph idx="101" type="title" hasCustomPrompt="1"/>
+          </p:nvPr>
+        </p:nvSpPr>
+        <p:spPr>
+          <a:xfrm>
+            <a:off x="457200" y="420624"/>
+            <a:ext cx="8229600" cy="731520"/>
+          </a:xfrm>
+          <a:prstGeom prst="rect">
+            <a:avLst/>
+          </a:prstGeom>
+          <a:noFill/>
+          <a:ln/>
+        </p:spPr>
+        <p:txBody>
+          <a:bodyPr wrap="square" lIns="0" tIns="0" rIns="0" bIns="0" rtlCol="0" anchor="t"/>
+          <a:lstStyle/>
+          <a:p>
+            <a:pPr algn="r" indent="0" marL="0">
+              <a:buNone/>
+            </a:pPr>
+            <a:endParaRPr lang="en-US" sz="2600" dirty="0"/>
           </a:p>
         </p:txBody>
       </p:sp>
@@ -6901,7 +6797,7 @@
             <a:lvl1pPr>
               <a:defRPr sz="900">
                 <a:solidFill>
-                  <a:srgbClr val="6B6F76"/>
+                  <a:srgbClr val="6E7B88"/>
                 </a:solidFill>
               </a:defRPr>
             </a:lvl1pPr>
@@ -6943,39 +6839,40 @@
       </p:grpSpPr>
       <p:sp>
         <p:nvSpPr>
-          <p:cNvPr id="2" name="Text 3"/>
-          <p:cNvSpPr/>
-          <p:nvPr>
-            <p:ph idx="103" type="title" hasCustomPrompt="1"/>
-          </p:nvPr>
-        </p:nvSpPr>
-        <p:spPr>
-          <a:xfrm>
-            <a:off x="457200" y="347472"/>
-            <a:ext cx="8229600" cy="685800"/>
-          </a:xfrm>
-          <a:prstGeom prst="rect">
-            <a:avLst/>
-          </a:prstGeom>
-          <a:noFill/>
-          <a:ln/>
-        </p:spPr>
-        <p:txBody>
-          <a:bodyPr wrap="square" lIns="0" tIns="0" rIns="0" bIns="0" rtlCol="0" anchor="ctr"/>
+          <p:cNvPr id="2" name="Text 0"/>
+          <p:cNvSpPr txBox="1"/>
+          <p:nvPr/>
+        </p:nvSpPr>
+        <p:spPr>
+          <a:xfrm>
+            <a:off x="457200" y="402336"/>
+            <a:ext cx="8229600" cy="749808"/>
+          </a:xfrm>
+          <a:prstGeom prst="rect">
+            <a:avLst/>
+          </a:prstGeom>
+          <a:noFill/>
+          <a:ln/>
+        </p:spPr>
+        <p:txBody>
+          <a:bodyPr wrap="square" lIns="0" tIns="0" rIns="0" bIns="0" rtlCol="0" anchor="t"/>
           <a:lstStyle/>
           <a:p>
             <a:pPr rtl="1" algn="r" indent="0" marL="0">
               <a:buNone/>
             </a:pPr>
             <a:r>
-              <a:rPr lang="en-US" sz="2600" b="1" dirty="0">
-                <a:solidFill>
-                  <a:srgbClr val="0B0B0B"/>
-                </a:solidFill>
+              <a:rPr lang="ar-AE" altLang="en-US" sz="2600" b="1" dirty="0">
+                <a:solidFill>
+                  <a:schemeClr val="tx1"/>
+                </a:solidFill>
+                <a:latin typeface="Cambria" pitchFamily="34" charset="0"/>
+                <a:ea typeface="Cambria" pitchFamily="34" charset="-122"/>
+                <a:cs typeface="Cambria" pitchFamily="34" charset="-120"/>
               </a:rPr>
               <a:t>داخل الاجتماع: أسئلة الاكتشاف أولاً</a:t>
             </a:r>
-            <a:endParaRPr lang="en-US" sz="2600" dirty="0"/>
+            <a:endParaRPr lang="ar-AE" sz="2600" dirty="0"/>
           </a:p>
         </p:txBody>
       </p:sp>
@@ -7102,11 +6999,11 @@
             <a:avLst/>
           </a:prstGeom>
           <a:solidFill>
-            <a:srgbClr val="F4F1EA"/>
+            <a:srgbClr val="F4F1EB"/>
           </a:solidFill>
           <a:ln w="12700">
             <a:solidFill>
-              <a:srgbClr val="F4F1EA"/>
+              <a:srgbClr val="F4F1EB"/>
             </a:solidFill>
             <a:prstDash val="solid"/>
           </a:ln>
@@ -7227,7 +7124,7 @@
           </a:solidFill>
           <a:ln w="12700">
             <a:solidFill>
-              <a:srgbClr val="F4F1EA"/>
+              <a:srgbClr val="F4F1EB"/>
             </a:solidFill>
             <a:prstDash val="solid"/>
           </a:ln>
@@ -7344,11 +7241,11 @@
             <a:avLst/>
           </a:prstGeom>
           <a:solidFill>
-            <a:srgbClr val="F4F1EA"/>
+            <a:srgbClr val="F4F1EB"/>
           </a:solidFill>
           <a:ln w="12700">
             <a:solidFill>
-              <a:srgbClr val="F4F1EA"/>
+              <a:srgbClr val="F4F1EB"/>
             </a:solidFill>
             <a:prstDash val="solid"/>
           </a:ln>
@@ -7469,7 +7366,7 @@
           </a:solidFill>
           <a:ln w="12700">
             <a:solidFill>
-              <a:srgbClr val="F4F1EA"/>
+              <a:srgbClr val="F4F1EB"/>
             </a:solidFill>
             <a:prstDash val="solid"/>
           </a:ln>
@@ -7586,11 +7483,11 @@
             <a:avLst/>
           </a:prstGeom>
           <a:solidFill>
-            <a:srgbClr val="F4F1EA"/>
+            <a:srgbClr val="F4F1EB"/>
           </a:solidFill>
           <a:ln w="12700">
             <a:solidFill>
-              <a:srgbClr val="F4F1EA"/>
+              <a:srgbClr val="F4F1EB"/>
             </a:solidFill>
             <a:prstDash val="solid"/>
           </a:ln>
@@ -7711,7 +7608,7 @@
           </a:solidFill>
           <a:ln w="12700">
             <a:solidFill>
-              <a:srgbClr val="F4F1EA"/>
+              <a:srgbClr val="F4F1EB"/>
             </a:solidFill>
             <a:prstDash val="solid"/>
           </a:ln>
@@ -7815,6 +7712,36 @@
       </p:sp>
       <p:sp>
         <p:nvSpPr>
+          <p:cNvPr id="30" name="Text 0"/>
+          <p:cNvSpPr/>
+          <p:nvPr>
+            <p:ph idx="101" type="title" hasCustomPrompt="1"/>
+          </p:nvPr>
+        </p:nvSpPr>
+        <p:spPr>
+          <a:xfrm>
+            <a:off x="457200" y="420624"/>
+            <a:ext cx="8229600" cy="731520"/>
+          </a:xfrm>
+          <a:prstGeom prst="rect">
+            <a:avLst/>
+          </a:prstGeom>
+          <a:noFill/>
+          <a:ln/>
+        </p:spPr>
+        <p:txBody>
+          <a:bodyPr wrap="square" lIns="0" tIns="0" rIns="0" bIns="0" rtlCol="0" anchor="t"/>
+          <a:lstStyle/>
+          <a:p>
+            <a:pPr algn="r" indent="0" marL="0">
+              <a:buNone/>
+            </a:pPr>
+            <a:endParaRPr lang="en-US" sz="2600" dirty="0"/>
+          </a:p>
+        </p:txBody>
+      </p:sp>
+      <p:sp>
+        <p:nvSpPr>
           <p:cNvPr id="25" name="Slide Number Placeholder 0"/>
           <p:cNvSpPr>
             <a:spLocks noGrp="1"/>
@@ -7843,7 +7770,7 @@
             <a:lvl1pPr>
               <a:defRPr sz="900">
                 <a:solidFill>
-                  <a:srgbClr val="6B6F76"/>
+                  <a:srgbClr val="6E7B88"/>
                 </a:solidFill>
               </a:defRPr>
             </a:lvl1pPr>
@@ -7930,17 +7857,17 @@
         </p:nvSpPr>
         <p:spPr>
           <a:xfrm>
-            <a:off x="914400" y="2834640"/>
-            <a:ext cx="7772400" cy="731520"/>
-          </a:xfrm>
-          <a:prstGeom prst="rect">
-            <a:avLst/>
-          </a:prstGeom>
-          <a:noFill/>
-          <a:ln/>
-        </p:spPr>
-        <p:txBody>
-          <a:bodyPr wrap="square" lIns="0" tIns="0" rIns="0" bIns="0" rtlCol="0" anchor="t"/>
+            <a:off x="914400" y="2743200"/>
+            <a:ext cx="7772400" cy="868680"/>
+          </a:xfrm>
+          <a:prstGeom prst="rect">
+            <a:avLst/>
+          </a:prstGeom>
+          <a:noFill/>
+          <a:ln/>
+        </p:spPr>
+        <p:txBody>
+          <a:bodyPr wrap="square" lIns="0" tIns="0" rIns="0" bIns="0" rtlCol="0" anchor="b"/>
           <a:lstStyle/>
           <a:p>
             <a:pPr rtl="1" algn="r" indent="0" marL="0">
@@ -7969,17 +7896,17 @@
         </p:nvSpPr>
         <p:spPr>
           <a:xfrm>
-            <a:off x="914400" y="3566160"/>
-            <a:ext cx="7772400" cy="548640"/>
-          </a:xfrm>
-          <a:prstGeom prst="rect">
-            <a:avLst/>
-          </a:prstGeom>
-          <a:noFill/>
-          <a:ln/>
-        </p:spPr>
-        <p:txBody>
-          <a:bodyPr wrap="square" lIns="0" tIns="0" rIns="0" bIns="0" rtlCol="0" anchor="ctr"/>
+            <a:off x="914400" y="3675888"/>
+            <a:ext cx="7772400" cy="502920"/>
+          </a:xfrm>
+          <a:prstGeom prst="rect">
+            <a:avLst/>
+          </a:prstGeom>
+          <a:noFill/>
+          <a:ln/>
+        </p:spPr>
+        <p:txBody>
+          <a:bodyPr wrap="square" lIns="0" tIns="0" rIns="0" bIns="0" rtlCol="0" anchor="t"/>
           <a:lstStyle/>
           <a:p>
             <a:pPr rtl="1" algn="r" indent="0" marL="0">
@@ -8027,7 +7954,7 @@
             <a:lvl1pPr>
               <a:defRPr sz="900">
                 <a:solidFill>
-                  <a:srgbClr val="D8C39A"/>
+                  <a:srgbClr val="D9B38C"/>
                 </a:solidFill>
               </a:defRPr>
             </a:lvl1pPr>
@@ -8069,39 +7996,40 @@
       </p:grpSpPr>
       <p:sp>
         <p:nvSpPr>
-          <p:cNvPr id="2" name="Text 3"/>
-          <p:cNvSpPr/>
-          <p:nvPr>
-            <p:ph idx="103" type="title" hasCustomPrompt="1"/>
-          </p:nvPr>
-        </p:nvSpPr>
-        <p:spPr>
-          <a:xfrm>
-            <a:off x="457200" y="347472"/>
-            <a:ext cx="8229600" cy="685800"/>
-          </a:xfrm>
-          <a:prstGeom prst="rect">
-            <a:avLst/>
-          </a:prstGeom>
-          <a:noFill/>
-          <a:ln/>
-        </p:spPr>
-        <p:txBody>
-          <a:bodyPr wrap="square" lIns="0" tIns="0" rIns="0" bIns="0" rtlCol="0" anchor="ctr"/>
+          <p:cNvPr id="2" name="Text 0"/>
+          <p:cNvSpPr txBox="1"/>
+          <p:nvPr/>
+        </p:nvSpPr>
+        <p:spPr>
+          <a:xfrm>
+            <a:off x="457200" y="402336"/>
+            <a:ext cx="8229600" cy="749808"/>
+          </a:xfrm>
+          <a:prstGeom prst="rect">
+            <a:avLst/>
+          </a:prstGeom>
+          <a:noFill/>
+          <a:ln/>
+        </p:spPr>
+        <p:txBody>
+          <a:bodyPr wrap="square" lIns="0" tIns="0" rIns="0" bIns="0" rtlCol="0" anchor="t"/>
           <a:lstStyle/>
           <a:p>
             <a:pPr rtl="1" algn="r" indent="0" marL="0">
               <a:buNone/>
             </a:pPr>
             <a:r>
-              <a:rPr lang="en-US" sz="2600" b="1" dirty="0">
-                <a:solidFill>
-                  <a:srgbClr val="0B0B0B"/>
-                </a:solidFill>
+              <a:rPr lang="ar-AE" altLang="en-US" sz="2600" b="1" dirty="0">
+                <a:solidFill>
+                  <a:schemeClr val="tx1"/>
+                </a:solidFill>
+                <a:latin typeface="Cambria" pitchFamily="34" charset="0"/>
+                <a:ea typeface="Cambria" pitchFamily="34" charset="-122"/>
+                <a:cs typeface="Cambria" pitchFamily="34" charset="-120"/>
               </a:rPr>
               <a:t>نموذج الإيرادات</a:t>
             </a:r>
-            <a:endParaRPr lang="en-US" sz="2600" dirty="0"/>
+            <a:endParaRPr lang="ar-AE" sz="2600" dirty="0"/>
           </a:p>
         </p:txBody>
       </p:sp>
@@ -8156,11 +8084,11 @@
             <a:avLst/>
           </a:prstGeom>
           <a:solidFill>
-            <a:srgbClr val="F4F1EA"/>
+            <a:srgbClr val="F4F1EB"/>
           </a:solidFill>
           <a:ln w="12700">
             <a:solidFill>
-              <a:srgbClr val="F4F1EA"/>
+              <a:srgbClr val="F4F1EB"/>
             </a:solidFill>
             <a:prstDash val="solid"/>
           </a:ln>
@@ -8276,11 +8204,11 @@
             <a:avLst/>
           </a:prstGeom>
           <a:solidFill>
-            <a:srgbClr val="F4F1EA"/>
+            <a:srgbClr val="F4F1EB"/>
           </a:solidFill>
           <a:ln w="12700">
             <a:solidFill>
-              <a:srgbClr val="F4F1EA"/>
+              <a:srgbClr val="F4F1EB"/>
             </a:solidFill>
             <a:prstDash val="solid"/>
           </a:ln>
@@ -8396,11 +8324,11 @@
             <a:avLst/>
           </a:prstGeom>
           <a:solidFill>
-            <a:srgbClr val="F4F1EA"/>
+            <a:srgbClr val="F4F1EB"/>
           </a:solidFill>
           <a:ln w="12700">
             <a:solidFill>
-              <a:srgbClr val="F4F1EA"/>
+              <a:srgbClr val="F4F1EB"/>
             </a:solidFill>
             <a:prstDash val="solid"/>
           </a:ln>
@@ -8498,6 +8426,36 @@
               <a:t>تأسيس شركات، هيكلة ضريبية، نقل ملكية، مكتب عائلي، صناديق ومؤسسات، عقود شراكة، هيكلة التركات.</a:t>
             </a:r>
             <a:endParaRPr lang="ar-AE" sz="1400" dirty="0"/>
+          </a:p>
+        </p:txBody>
+      </p:sp>
+      <p:sp>
+        <p:nvSpPr>
+          <p:cNvPr id="13" name="Text 0"/>
+          <p:cNvSpPr/>
+          <p:nvPr>
+            <p:ph idx="101" type="title" hasCustomPrompt="1"/>
+          </p:nvPr>
+        </p:nvSpPr>
+        <p:spPr>
+          <a:xfrm>
+            <a:off x="457200" y="420624"/>
+            <a:ext cx="8229600" cy="731520"/>
+          </a:xfrm>
+          <a:prstGeom prst="rect">
+            <a:avLst/>
+          </a:prstGeom>
+          <a:noFill/>
+          <a:ln/>
+        </p:spPr>
+        <p:txBody>
+          <a:bodyPr wrap="square" lIns="0" tIns="0" rIns="0" bIns="0" rtlCol="0" anchor="t"/>
+          <a:lstStyle/>
+          <a:p>
+            <a:pPr algn="r" indent="0" marL="0">
+              <a:buNone/>
+            </a:pPr>
+            <a:endParaRPr lang="en-US" sz="2600" dirty="0"/>
           </a:p>
         </p:txBody>
       </p:sp>
@@ -8531,7 +8489,7 @@
             <a:lvl1pPr>
               <a:defRPr sz="900">
                 <a:solidFill>
-                  <a:srgbClr val="6B6F76"/>
+                  <a:srgbClr val="6E7B88"/>
                 </a:solidFill>
               </a:defRPr>
             </a:lvl1pPr>
@@ -8573,39 +8531,40 @@
       </p:grpSpPr>
       <p:sp>
         <p:nvSpPr>
-          <p:cNvPr id="2" name="Text 3"/>
-          <p:cNvSpPr/>
-          <p:nvPr>
-            <p:ph idx="103" type="title" hasCustomPrompt="1"/>
-          </p:nvPr>
-        </p:nvSpPr>
-        <p:spPr>
-          <a:xfrm>
-            <a:off x="457200" y="347472"/>
-            <a:ext cx="8229600" cy="685800"/>
-          </a:xfrm>
-          <a:prstGeom prst="rect">
-            <a:avLst/>
-          </a:prstGeom>
-          <a:noFill/>
-          <a:ln/>
-        </p:spPr>
-        <p:txBody>
-          <a:bodyPr wrap="square" lIns="0" tIns="0" rIns="0" bIns="0" rtlCol="0" anchor="ctr"/>
+          <p:cNvPr id="2" name="Text 0"/>
+          <p:cNvSpPr txBox="1"/>
+          <p:nvPr/>
+        </p:nvSpPr>
+        <p:spPr>
+          <a:xfrm>
+            <a:off x="457200" y="402336"/>
+            <a:ext cx="8229600" cy="749808"/>
+          </a:xfrm>
+          <a:prstGeom prst="rect">
+            <a:avLst/>
+          </a:prstGeom>
+          <a:noFill/>
+          <a:ln/>
+        </p:spPr>
+        <p:txBody>
+          <a:bodyPr wrap="square" lIns="0" tIns="0" rIns="0" bIns="0" rtlCol="0" anchor="t"/>
           <a:lstStyle/>
           <a:p>
             <a:pPr rtl="1" algn="r" indent="0" marL="0">
               <a:buNone/>
             </a:pPr>
             <a:r>
-              <a:rPr lang="en-US" sz="2600" b="1" dirty="0">
-                <a:solidFill>
-                  <a:srgbClr val="0B0B0B"/>
-                </a:solidFill>
+              <a:rPr lang="ar-AE" altLang="en-US" sz="2600" b="1" dirty="0">
+                <a:solidFill>
+                  <a:schemeClr val="tx1"/>
+                </a:solidFill>
+                <a:latin typeface="Cambria" pitchFamily="34" charset="0"/>
+                <a:ea typeface="Cambria" pitchFamily="34" charset="-122"/>
+                <a:cs typeface="Cambria" pitchFamily="34" charset="-120"/>
               </a:rPr>
               <a:t>أهم نقطة تسويقية</a:t>
             </a:r>
-            <a:endParaRPr lang="en-US" sz="2600" dirty="0"/>
+            <a:endParaRPr lang="ar-AE" sz="2600" dirty="0"/>
           </a:p>
         </p:txBody>
       </p:sp>
@@ -8660,11 +8619,11 @@
             <a:avLst/>
           </a:prstGeom>
           <a:solidFill>
-            <a:srgbClr val="F4F1EA"/>
+            <a:srgbClr val="F4F1EB"/>
           </a:solidFill>
           <a:ln w="12700">
             <a:solidFill>
-              <a:srgbClr val="F4F1EA"/>
+              <a:srgbClr val="F4F1EB"/>
             </a:solidFill>
             <a:prstDash val="solid"/>
           </a:ln>
@@ -8765,11 +8724,11 @@
             <a:avLst/>
           </a:prstGeom>
           <a:solidFill>
-            <a:srgbClr val="F4F1EA"/>
+            <a:srgbClr val="F4F1EB"/>
           </a:solidFill>
           <a:ln w="12700">
             <a:solidFill>
-              <a:srgbClr val="F4F1EA"/>
+              <a:srgbClr val="F4F1EB"/>
             </a:solidFill>
             <a:prstDash val="solid"/>
           </a:ln>
@@ -8870,11 +8829,11 @@
             <a:avLst/>
           </a:prstGeom>
           <a:solidFill>
-            <a:srgbClr val="F4F1EA"/>
+            <a:srgbClr val="F4F1EB"/>
           </a:solidFill>
           <a:ln w="12700">
             <a:solidFill>
-              <a:srgbClr val="F4F1EA"/>
+              <a:srgbClr val="F4F1EB"/>
             </a:solidFill>
             <a:prstDash val="solid"/>
           </a:ln>
@@ -8975,11 +8934,11 @@
             <a:avLst/>
           </a:prstGeom>
           <a:solidFill>
-            <a:srgbClr val="F4F1EA"/>
+            <a:srgbClr val="F4F1EB"/>
           </a:solidFill>
           <a:ln w="12700">
             <a:solidFill>
-              <a:srgbClr val="F4F1EA"/>
+              <a:srgbClr val="F4F1EB"/>
             </a:solidFill>
             <a:prstDash val="solid"/>
           </a:ln>
@@ -9067,6 +9026,36 @@
       </p:sp>
       <p:sp>
         <p:nvSpPr>
+          <p:cNvPr id="16" name="Text 0"/>
+          <p:cNvSpPr/>
+          <p:nvPr>
+            <p:ph idx="101" type="title" hasCustomPrompt="1"/>
+          </p:nvPr>
+        </p:nvSpPr>
+        <p:spPr>
+          <a:xfrm>
+            <a:off x="457200" y="420624"/>
+            <a:ext cx="8229600" cy="731520"/>
+          </a:xfrm>
+          <a:prstGeom prst="rect">
+            <a:avLst/>
+          </a:prstGeom>
+          <a:noFill/>
+          <a:ln/>
+        </p:spPr>
+        <p:txBody>
+          <a:bodyPr wrap="square" lIns="0" tIns="0" rIns="0" bIns="0" rtlCol="0" anchor="t"/>
+          <a:lstStyle/>
+          <a:p>
+            <a:pPr algn="r" indent="0" marL="0">
+              <a:buNone/>
+            </a:pPr>
+            <a:endParaRPr lang="en-US" sz="2600" dirty="0"/>
+          </a:p>
+        </p:txBody>
+      </p:sp>
+      <p:sp>
+        <p:nvSpPr>
           <p:cNvPr id="25" name="Slide Number Placeholder 0"/>
           <p:cNvSpPr>
             <a:spLocks noGrp="1"/>
@@ -9095,7 +9084,7 @@
             <a:lvl1pPr>
               <a:defRPr sz="900">
                 <a:solidFill>
-                  <a:srgbClr val="6B6F76"/>
+                  <a:srgbClr val="6E7B88"/>
                 </a:solidFill>
               </a:defRPr>
             </a:lvl1pPr>
@@ -9137,75 +9126,76 @@
       </p:grpSpPr>
       <p:sp>
         <p:nvSpPr>
-          <p:cNvPr id="2" name="Text 3"/>
-          <p:cNvSpPr/>
-          <p:nvPr>
-            <p:ph idx="103" type="title" hasCustomPrompt="1"/>
-          </p:nvPr>
-        </p:nvSpPr>
-        <p:spPr>
-          <a:xfrm>
-            <a:off x="457200" y="347472"/>
-            <a:ext cx="8229600" cy="685800"/>
-          </a:xfrm>
-          <a:prstGeom prst="rect">
-            <a:avLst/>
-          </a:prstGeom>
-          <a:noFill/>
-          <a:ln/>
-        </p:spPr>
-        <p:txBody>
-          <a:bodyPr wrap="square" lIns="0" tIns="0" rIns="0" bIns="0" rtlCol="0" anchor="ctr"/>
+          <p:cNvPr id="2" name="Text 0"/>
+          <p:cNvSpPr txBox="1"/>
+          <p:nvPr/>
+        </p:nvSpPr>
+        <p:spPr>
+          <a:xfrm>
+            <a:off x="457200" y="402336"/>
+            <a:ext cx="8229600" cy="749808"/>
+          </a:xfrm>
+          <a:prstGeom prst="rect">
+            <a:avLst/>
+          </a:prstGeom>
+          <a:noFill/>
+          <a:ln/>
+        </p:spPr>
+        <p:txBody>
+          <a:bodyPr wrap="square" lIns="0" tIns="0" rIns="0" bIns="0" rtlCol="0" anchor="t"/>
           <a:lstStyle/>
           <a:p>
             <a:pPr rtl="1" algn="r" indent="0" marL="0">
               <a:buNone/>
             </a:pPr>
             <a:r>
-              <a:rPr lang="en-US" sz="2600" b="1" dirty="0">
-                <a:solidFill>
-                  <a:srgbClr val="0B0B0B"/>
-                </a:solidFill>
-              </a:rPr>
-              <a:t>جدول العرض</a:t>
-            </a:r>
-            <a:endParaRPr lang="en-US" sz="2600" dirty="0"/>
-          </a:p>
-        </p:txBody>
-      </p:sp>
-      <p:sp>
-        <p:nvSpPr>
-          <p:cNvPr id="3" name="Text 1"/>
-          <p:cNvSpPr txBox="1"/>
-          <p:nvPr/>
-        </p:nvSpPr>
-        <p:spPr>
-          <a:xfrm>
-            <a:off x="8229600" y="1234440"/>
-            <a:ext cx="457200" cy="530352"/>
-          </a:xfrm>
-          <a:prstGeom prst="rect">
-            <a:avLst/>
-          </a:prstGeom>
-          <a:noFill/>
-          <a:ln/>
-        </p:spPr>
-        <p:txBody>
-          <a:bodyPr wrap="square" lIns="0" tIns="0" rIns="0" bIns="0" rtlCol="0" anchor="ctr"/>
-          <a:lstStyle/>
-          <a:p>
-            <a:pPr algn="r" indent="0" marL="0">
-              <a:buNone/>
-            </a:pPr>
-            <a:r>
-              <a:rPr lang="en-US" sz="1800" b="1" dirty="0">
-                <a:solidFill>
-                  <a:schemeClr val="accent1"/>
+              <a:rPr lang="ar-AE" altLang="en-US" sz="2600" b="1" dirty="0">
+                <a:solidFill>
+                  <a:schemeClr val="tx1"/>
                 </a:solidFill>
                 <a:latin typeface="Cambria" pitchFamily="34" charset="0"/>
                 <a:ea typeface="Cambria" pitchFamily="34" charset="-122"/>
                 <a:cs typeface="Cambria" pitchFamily="34" charset="-120"/>
               </a:rPr>
+              <a:t>جدول العرض</a:t>
+            </a:r>
+            <a:endParaRPr lang="ar-AE" sz="2600" dirty="0"/>
+          </a:p>
+        </p:txBody>
+      </p:sp>
+      <p:sp>
+        <p:nvSpPr>
+          <p:cNvPr id="3" name="Text 1"/>
+          <p:cNvSpPr txBox="1"/>
+          <p:nvPr/>
+        </p:nvSpPr>
+        <p:spPr>
+          <a:xfrm>
+            <a:off x="8229600" y="1234440"/>
+            <a:ext cx="457200" cy="530352"/>
+          </a:xfrm>
+          <a:prstGeom prst="rect">
+            <a:avLst/>
+          </a:prstGeom>
+          <a:noFill/>
+          <a:ln/>
+        </p:spPr>
+        <p:txBody>
+          <a:bodyPr wrap="square" lIns="0" tIns="0" rIns="0" bIns="0" rtlCol="0" anchor="ctr"/>
+          <a:lstStyle/>
+          <a:p>
+            <a:pPr algn="r" indent="0" marL="0">
+              <a:buNone/>
+            </a:pPr>
+            <a:r>
+              <a:rPr lang="en-US" sz="1800" b="1" dirty="0">
+                <a:solidFill>
+                  <a:schemeClr val="accent1"/>
+                </a:solidFill>
+                <a:latin typeface="Cambria" pitchFamily="34" charset="0"/>
+                <a:ea typeface="Cambria" pitchFamily="34" charset="-122"/>
+                <a:cs typeface="Cambria" pitchFamily="34" charset="-120"/>
+              </a:rPr>
               <a:t>01</a:t>
             </a:r>
             <a:endParaRPr lang="en-US" sz="1800" dirty="0"/>
@@ -9265,7 +9255,7 @@
           <a:noFill/>
           <a:ln w="6350">
             <a:solidFill>
-              <a:srgbClr val="E9E4DA"/>
+              <a:srgbClr val="E6E1D8"/>
             </a:solidFill>
             <a:prstDash val="solid"/>
           </a:ln>
@@ -9363,7 +9353,7 @@
           <a:noFill/>
           <a:ln w="6350">
             <a:solidFill>
-              <a:srgbClr val="E9E4DA"/>
+              <a:srgbClr val="E6E1D8"/>
             </a:solidFill>
             <a:prstDash val="solid"/>
           </a:ln>
@@ -9461,7 +9451,7 @@
           <a:noFill/>
           <a:ln w="6350">
             <a:solidFill>
-              <a:srgbClr val="E9E4DA"/>
+              <a:srgbClr val="E6E1D8"/>
             </a:solidFill>
             <a:prstDash val="solid"/>
           </a:ln>
@@ -9559,7 +9549,7 @@
           <a:noFill/>
           <a:ln w="6350">
             <a:solidFill>
-              <a:srgbClr val="E9E4DA"/>
+              <a:srgbClr val="E6E1D8"/>
             </a:solidFill>
             <a:prstDash val="solid"/>
           </a:ln>
@@ -9657,7 +9647,7 @@
           <a:noFill/>
           <a:ln w="6350">
             <a:solidFill>
-              <a:srgbClr val="E9E4DA"/>
+              <a:srgbClr val="E6E1D8"/>
             </a:solidFill>
             <a:prstDash val="solid"/>
           </a:ln>
@@ -9755,11 +9745,41 @@
           <a:noFill/>
           <a:ln w="6350">
             <a:solidFill>
-              <a:srgbClr val="E9E4DA"/>
+              <a:srgbClr val="E6E1D8"/>
             </a:solidFill>
             <a:prstDash val="solid"/>
           </a:ln>
         </p:spPr>
+      </p:sp>
+      <p:sp>
+        <p:nvSpPr>
+          <p:cNvPr id="21" name="Text 0"/>
+          <p:cNvSpPr/>
+          <p:nvPr>
+            <p:ph idx="101" type="title" hasCustomPrompt="1"/>
+          </p:nvPr>
+        </p:nvSpPr>
+        <p:spPr>
+          <a:xfrm>
+            <a:off x="457200" y="420624"/>
+            <a:ext cx="8229600" cy="731520"/>
+          </a:xfrm>
+          <a:prstGeom prst="rect">
+            <a:avLst/>
+          </a:prstGeom>
+          <a:noFill/>
+          <a:ln/>
+        </p:spPr>
+        <p:txBody>
+          <a:bodyPr wrap="square" lIns="0" tIns="0" rIns="0" bIns="0" rtlCol="0" anchor="t"/>
+          <a:lstStyle/>
+          <a:p>
+            <a:pPr algn="r" indent="0" marL="0">
+              <a:buNone/>
+            </a:pPr>
+            <a:endParaRPr lang="en-US" sz="2600" dirty="0"/>
+          </a:p>
+        </p:txBody>
       </p:sp>
       <p:sp>
         <p:nvSpPr>
@@ -9791,7 +9811,7 @@
             <a:lvl1pPr>
               <a:defRPr sz="900">
                 <a:solidFill>
-                  <a:srgbClr val="6B6F76"/>
+                  <a:srgbClr val="6E7B88"/>
                 </a:solidFill>
               </a:defRPr>
             </a:lvl1pPr>
@@ -9833,39 +9853,40 @@
       </p:grpSpPr>
       <p:sp>
         <p:nvSpPr>
-          <p:cNvPr id="2" name="Text 3"/>
-          <p:cNvSpPr/>
-          <p:nvPr>
-            <p:ph idx="103" type="title" hasCustomPrompt="1"/>
-          </p:nvPr>
-        </p:nvSpPr>
-        <p:spPr>
-          <a:xfrm>
-            <a:off x="457200" y="347472"/>
-            <a:ext cx="8229600" cy="685800"/>
-          </a:xfrm>
-          <a:prstGeom prst="rect">
-            <a:avLst/>
-          </a:prstGeom>
-          <a:noFill/>
-          <a:ln/>
-        </p:spPr>
-        <p:txBody>
-          <a:bodyPr wrap="square" lIns="0" tIns="0" rIns="0" bIns="0" rtlCol="0" anchor="ctr"/>
+          <p:cNvPr id="2" name="Text 0"/>
+          <p:cNvSpPr txBox="1"/>
+          <p:nvPr/>
+        </p:nvSpPr>
+        <p:spPr>
+          <a:xfrm>
+            <a:off x="457200" y="402336"/>
+            <a:ext cx="8229600" cy="749808"/>
+          </a:xfrm>
+          <a:prstGeom prst="rect">
+            <a:avLst/>
+          </a:prstGeom>
+          <a:noFill/>
+          <a:ln/>
+        </p:spPr>
+        <p:txBody>
+          <a:bodyPr wrap="square" lIns="0" tIns="0" rIns="0" bIns="0" rtlCol="0" anchor="t"/>
           <a:lstStyle/>
           <a:p>
             <a:pPr rtl="1" algn="r" indent="0" marL="0">
               <a:buNone/>
             </a:pPr>
             <a:r>
-              <a:rPr lang="en-US" sz="2600" b="1" dirty="0">
-                <a:solidFill>
-                  <a:srgbClr val="0B0B0B"/>
-                </a:solidFill>
+              <a:rPr lang="ar-AE" altLang="en-US" sz="2600" b="1" dirty="0">
+                <a:solidFill>
+                  <a:schemeClr val="tx1"/>
+                </a:solidFill>
+                <a:latin typeface="Cambria" pitchFamily="34" charset="0"/>
+                <a:ea typeface="Cambria" pitchFamily="34" charset="-122"/>
+                <a:cs typeface="Cambria" pitchFamily="34" charset="-120"/>
               </a:rPr>
               <a:t>خدمة قانونية بمستوى Concierge</a:t>
             </a:r>
-            <a:endParaRPr lang="en-US" sz="2600" dirty="0"/>
+            <a:endParaRPr lang="ar-AE" sz="2600" dirty="0"/>
           </a:p>
         </p:txBody>
       </p:sp>
@@ -9920,11 +9941,11 @@
             <a:avLst/>
           </a:prstGeom>
           <a:solidFill>
-            <a:srgbClr val="F4F1EA"/>
+            <a:srgbClr val="F4F1EB"/>
           </a:solidFill>
           <a:ln w="12700">
             <a:solidFill>
-              <a:srgbClr val="F4F1EA"/>
+              <a:srgbClr val="F4F1EB"/>
             </a:solidFill>
             <a:prstDash val="solid"/>
           </a:ln>
@@ -10025,11 +10046,11 @@
             <a:avLst/>
           </a:prstGeom>
           <a:solidFill>
-            <a:srgbClr val="F4F1EA"/>
+            <a:srgbClr val="F4F1EB"/>
           </a:solidFill>
           <a:ln w="12700">
             <a:solidFill>
-              <a:srgbClr val="F4F1EA"/>
+              <a:srgbClr val="F4F1EB"/>
             </a:solidFill>
             <a:prstDash val="solid"/>
           </a:ln>
@@ -10130,11 +10151,11 @@
             <a:avLst/>
           </a:prstGeom>
           <a:solidFill>
-            <a:srgbClr val="F4F1EA"/>
+            <a:srgbClr val="F4F1EB"/>
           </a:solidFill>
           <a:ln w="12700">
             <a:solidFill>
-              <a:srgbClr val="F4F1EA"/>
+              <a:srgbClr val="F4F1EB"/>
             </a:solidFill>
             <a:prstDash val="solid"/>
           </a:ln>
@@ -10235,11 +10256,11 @@
             <a:avLst/>
           </a:prstGeom>
           <a:solidFill>
-            <a:srgbClr val="F4F1EA"/>
+            <a:srgbClr val="F4F1EB"/>
           </a:solidFill>
           <a:ln w="12700">
             <a:solidFill>
-              <a:srgbClr val="F4F1EA"/>
+              <a:srgbClr val="F4F1EB"/>
             </a:solidFill>
             <a:prstDash val="solid"/>
           </a:ln>
@@ -10340,11 +10361,11 @@
             <a:avLst/>
           </a:prstGeom>
           <a:solidFill>
-            <a:srgbClr val="F4F1EA"/>
+            <a:srgbClr val="F4F1EB"/>
           </a:solidFill>
           <a:ln w="12700">
             <a:solidFill>
-              <a:srgbClr val="F4F1EA"/>
+              <a:srgbClr val="F4F1EB"/>
             </a:solidFill>
             <a:prstDash val="solid"/>
           </a:ln>
@@ -10432,6 +10453,36 @@
       </p:sp>
       <p:sp>
         <p:nvSpPr>
+          <p:cNvPr id="19" name="Text 0"/>
+          <p:cNvSpPr/>
+          <p:nvPr>
+            <p:ph idx="101" type="title" hasCustomPrompt="1"/>
+          </p:nvPr>
+        </p:nvSpPr>
+        <p:spPr>
+          <a:xfrm>
+            <a:off x="457200" y="420624"/>
+            <a:ext cx="8229600" cy="731520"/>
+          </a:xfrm>
+          <a:prstGeom prst="rect">
+            <a:avLst/>
+          </a:prstGeom>
+          <a:noFill/>
+          <a:ln/>
+        </p:spPr>
+        <p:txBody>
+          <a:bodyPr wrap="square" lIns="0" tIns="0" rIns="0" bIns="0" rtlCol="0" anchor="t"/>
+          <a:lstStyle/>
+          <a:p>
+            <a:pPr algn="r" indent="0" marL="0">
+              <a:buNone/>
+            </a:pPr>
+            <a:endParaRPr lang="en-US" sz="2600" dirty="0"/>
+          </a:p>
+        </p:txBody>
+      </p:sp>
+      <p:sp>
+        <p:nvSpPr>
           <p:cNvPr id="25" name="Slide Number Placeholder 0"/>
           <p:cNvSpPr>
             <a:spLocks noGrp="1"/>
@@ -10460,7 +10511,7 @@
             <a:lvl1pPr>
               <a:defRPr sz="900">
                 <a:solidFill>
-                  <a:srgbClr val="6B6F76"/>
+                  <a:srgbClr val="6E7B88"/>
                 </a:solidFill>
               </a:defRPr>
             </a:lvl1pPr>
@@ -10547,17 +10598,17 @@
         </p:nvSpPr>
         <p:spPr>
           <a:xfrm>
-            <a:off x="914400" y="2834640"/>
-            <a:ext cx="7772400" cy="731520"/>
-          </a:xfrm>
-          <a:prstGeom prst="rect">
-            <a:avLst/>
-          </a:prstGeom>
-          <a:noFill/>
-          <a:ln/>
-        </p:spPr>
-        <p:txBody>
-          <a:bodyPr wrap="square" lIns="0" tIns="0" rIns="0" bIns="0" rtlCol="0" anchor="t"/>
+            <a:off x="914400" y="2743200"/>
+            <a:ext cx="7772400" cy="868680"/>
+          </a:xfrm>
+          <a:prstGeom prst="rect">
+            <a:avLst/>
+          </a:prstGeom>
+          <a:noFill/>
+          <a:ln/>
+        </p:spPr>
+        <p:txBody>
+          <a:bodyPr wrap="square" lIns="0" tIns="0" rIns="0" bIns="0" rtlCol="0" anchor="b"/>
           <a:lstStyle/>
           <a:p>
             <a:pPr rtl="1" algn="r" indent="0" marL="0">
@@ -10586,17 +10637,17 @@
         </p:nvSpPr>
         <p:spPr>
           <a:xfrm>
-            <a:off x="914400" y="3566160"/>
-            <a:ext cx="7772400" cy="548640"/>
-          </a:xfrm>
-          <a:prstGeom prst="rect">
-            <a:avLst/>
-          </a:prstGeom>
-          <a:noFill/>
-          <a:ln/>
-        </p:spPr>
-        <p:txBody>
-          <a:bodyPr wrap="square" lIns="0" tIns="0" rIns="0" bIns="0" rtlCol="0" anchor="ctr"/>
+            <a:off x="914400" y="3675888"/>
+            <a:ext cx="7772400" cy="502920"/>
+          </a:xfrm>
+          <a:prstGeom prst="rect">
+            <a:avLst/>
+          </a:prstGeom>
+          <a:noFill/>
+          <a:ln/>
+        </p:spPr>
+        <p:txBody>
+          <a:bodyPr wrap="square" lIns="0" tIns="0" rIns="0" bIns="0" rtlCol="0" anchor="t"/>
           <a:lstStyle/>
           <a:p>
             <a:pPr rtl="1" algn="r" indent="0" marL="0">
@@ -10644,7 +10695,7 @@
             <a:lvl1pPr>
               <a:defRPr sz="900">
                 <a:solidFill>
-                  <a:srgbClr val="D8C39A"/>
+                  <a:srgbClr val="D9B38C"/>
                 </a:solidFill>
               </a:defRPr>
             </a:lvl1pPr>
@@ -10686,39 +10737,40 @@
       </p:grpSpPr>
       <p:sp>
         <p:nvSpPr>
-          <p:cNvPr id="2" name="Text 3"/>
-          <p:cNvSpPr/>
-          <p:nvPr>
-            <p:ph idx="103" type="title" hasCustomPrompt="1"/>
-          </p:nvPr>
-        </p:nvSpPr>
-        <p:spPr>
-          <a:xfrm>
-            <a:off x="457200" y="347472"/>
-            <a:ext cx="8229600" cy="685800"/>
-          </a:xfrm>
-          <a:prstGeom prst="rect">
-            <a:avLst/>
-          </a:prstGeom>
-          <a:noFill/>
-          <a:ln/>
-        </p:spPr>
-        <p:txBody>
-          <a:bodyPr wrap="square" lIns="0" tIns="0" rIns="0" bIns="0" rtlCol="0" anchor="ctr"/>
+          <p:cNvPr id="2" name="Text 0"/>
+          <p:cNvSpPr txBox="1"/>
+          <p:nvPr/>
+        </p:nvSpPr>
+        <p:spPr>
+          <a:xfrm>
+            <a:off x="457200" y="402336"/>
+            <a:ext cx="8229600" cy="749808"/>
+          </a:xfrm>
+          <a:prstGeom prst="rect">
+            <a:avLst/>
+          </a:prstGeom>
+          <a:noFill/>
+          <a:ln/>
+        </p:spPr>
+        <p:txBody>
+          <a:bodyPr wrap="square" lIns="0" tIns="0" rIns="0" bIns="0" rtlCol="0" anchor="t"/>
           <a:lstStyle/>
           <a:p>
             <a:pPr rtl="1" algn="r" indent="0" marL="0">
               <a:buNone/>
             </a:pPr>
             <a:r>
-              <a:rPr lang="en-US" sz="2600" b="1" dirty="0">
-                <a:solidFill>
-                  <a:srgbClr val="0B0B0B"/>
-                </a:solidFill>
+              <a:rPr lang="ar-AE" altLang="en-US" sz="2600" b="1" dirty="0">
+                <a:solidFill>
+                  <a:schemeClr val="tx1"/>
+                </a:solidFill>
+                <a:latin typeface="Cambria" pitchFamily="34" charset="0"/>
+                <a:ea typeface="Cambria" pitchFamily="34" charset="-122"/>
+                <a:cs typeface="Cambria" pitchFamily="34" charset="-120"/>
               </a:rPr>
               <a:t>من يفعل ماذا داخل المكتب</a:t>
             </a:r>
-            <a:endParaRPr lang="en-US" sz="2600" dirty="0"/>
+            <a:endParaRPr lang="ar-AE" sz="2600" dirty="0"/>
           </a:p>
         </p:txBody>
       </p:sp>
@@ -10797,7 +10849,7 @@
                       <a:r>
                         <a:rPr lang="en-US" sz="1100" b="1" dirty="0">
                           <a:solidFill>
-                            <a:srgbClr val="D8C39A"/>
+                            <a:srgbClr val="D9B38C"/>
                           </a:solidFill>
                           <a:latin typeface="+mn-lt" pitchFamily="34" charset="0"/>
                           <a:ea typeface="+mn-lt" pitchFamily="34" charset="-122"/>
@@ -10815,7 +10867,7 @@
                   <a:tcPr marL="91440" marR="91440" marT="45720" marB="45720" anchor="ctr">
                     <a:lnL w="6350" cap="flat" cmpd="sng" algn="ctr">
                       <a:solidFill>
-                        <a:srgbClr val="E9E4DA"/>
+                        <a:srgbClr val="E6E1D8"/>
                       </a:solidFill>
                       <a:prstDash val="solid"/>
                       <a:round/>
@@ -10824,7 +10876,7 @@
                     </a:lnL>
                     <a:lnR w="6350" cap="flat" cmpd="sng" algn="ctr">
                       <a:solidFill>
-                        <a:srgbClr val="E9E4DA"/>
+                        <a:srgbClr val="E6E1D8"/>
                       </a:solidFill>
                       <a:prstDash val="solid"/>
                       <a:round/>
@@ -10833,7 +10885,7 @@
                     </a:lnR>
                     <a:lnT w="6350" cap="flat" cmpd="sng" algn="ctr">
                       <a:solidFill>
-                        <a:srgbClr val="E9E4DA"/>
+                        <a:srgbClr val="E6E1D8"/>
                       </a:solidFill>
                       <a:prstDash val="solid"/>
                       <a:round/>
@@ -10842,7 +10894,7 @@
                     </a:lnT>
                     <a:lnB w="6350" cap="flat" cmpd="sng" algn="ctr">
                       <a:solidFill>
-                        <a:srgbClr val="E9E4DA"/>
+                        <a:srgbClr val="E6E1D8"/>
                       </a:solidFill>
                       <a:prstDash val="solid"/>
                       <a:round/>
@@ -10850,7 +10902,7 @@
                       <a:tailEnd type="none" w="med" len="med"/>
                     </a:lnB>
                     <a:solidFill>
-                      <a:srgbClr val="0B0B0B"/>
+                      <a:srgbClr val="0E2238"/>
                     </a:solidFill>
                   </a:tcPr>
                 </a:tc>
@@ -10865,7 +10917,7 @@
                       <a:r>
                         <a:rPr lang="en-US" sz="1100" b="1" dirty="0">
                           <a:solidFill>
-                            <a:srgbClr val="D8C39A"/>
+                            <a:srgbClr val="D9B38C"/>
                           </a:solidFill>
                           <a:latin typeface="+mn-lt" pitchFamily="34" charset="0"/>
                           <a:ea typeface="+mn-lt" pitchFamily="34" charset="-122"/>
@@ -10883,7 +10935,7 @@
                   <a:tcPr marL="91440" marR="91440" marT="45720" marB="45720" anchor="ctr">
                     <a:lnL w="6350" cap="flat" cmpd="sng" algn="ctr">
                       <a:solidFill>
-                        <a:srgbClr val="E9E4DA"/>
+                        <a:srgbClr val="E6E1D8"/>
                       </a:solidFill>
                       <a:prstDash val="solid"/>
                       <a:round/>
@@ -10892,7 +10944,7 @@
                     </a:lnL>
                     <a:lnR w="6350" cap="flat" cmpd="sng" algn="ctr">
                       <a:solidFill>
-                        <a:srgbClr val="E9E4DA"/>
+                        <a:srgbClr val="E6E1D8"/>
                       </a:solidFill>
                       <a:prstDash val="solid"/>
                       <a:round/>
@@ -10901,7 +10953,7 @@
                     </a:lnR>
                     <a:lnT w="6350" cap="flat" cmpd="sng" algn="ctr">
                       <a:solidFill>
-                        <a:srgbClr val="E9E4DA"/>
+                        <a:srgbClr val="E6E1D8"/>
                       </a:solidFill>
                       <a:prstDash val="solid"/>
                       <a:round/>
@@ -10910,7 +10962,7 @@
                     </a:lnT>
                     <a:lnB w="6350" cap="flat" cmpd="sng" algn="ctr">
                       <a:solidFill>
-                        <a:srgbClr val="E9E4DA"/>
+                        <a:srgbClr val="E6E1D8"/>
                       </a:solidFill>
                       <a:prstDash val="solid"/>
                       <a:round/>
@@ -10918,7 +10970,7 @@
                       <a:tailEnd type="none" w="med" len="med"/>
                     </a:lnB>
                     <a:solidFill>
-                      <a:srgbClr val="0B0B0B"/>
+                      <a:srgbClr val="0E2238"/>
                     </a:solidFill>
                   </a:tcPr>
                 </a:tc>
@@ -10933,7 +10985,7 @@
                       <a:r>
                         <a:rPr lang="en-US" sz="1100" b="1" dirty="0">
                           <a:solidFill>
-                            <a:srgbClr val="D8C39A"/>
+                            <a:srgbClr val="D9B38C"/>
                           </a:solidFill>
                           <a:latin typeface="+mn-lt" pitchFamily="34" charset="0"/>
                           <a:ea typeface="+mn-lt" pitchFamily="34" charset="-122"/>
@@ -10951,7 +11003,7 @@
                   <a:tcPr marL="91440" marR="91440" marT="45720" marB="45720" anchor="ctr">
                     <a:lnL w="6350" cap="flat" cmpd="sng" algn="ctr">
                       <a:solidFill>
-                        <a:srgbClr val="E9E4DA"/>
+                        <a:srgbClr val="E6E1D8"/>
                       </a:solidFill>
                       <a:prstDash val="solid"/>
                       <a:round/>
@@ -10960,7 +11012,7 @@
                     </a:lnL>
                     <a:lnR w="6350" cap="flat" cmpd="sng" algn="ctr">
                       <a:solidFill>
-                        <a:srgbClr val="E9E4DA"/>
+                        <a:srgbClr val="E6E1D8"/>
                       </a:solidFill>
                       <a:prstDash val="solid"/>
                       <a:round/>
@@ -10969,7 +11021,7 @@
                     </a:lnR>
                     <a:lnT w="6350" cap="flat" cmpd="sng" algn="ctr">
                       <a:solidFill>
-                        <a:srgbClr val="E9E4DA"/>
+                        <a:srgbClr val="E6E1D8"/>
                       </a:solidFill>
                       <a:prstDash val="solid"/>
                       <a:round/>
@@ -10978,7 +11030,7 @@
                     </a:lnT>
                     <a:lnB w="6350" cap="flat" cmpd="sng" algn="ctr">
                       <a:solidFill>
-                        <a:srgbClr val="E9E4DA"/>
+                        <a:srgbClr val="E6E1D8"/>
                       </a:solidFill>
                       <a:prstDash val="solid"/>
                       <a:round/>
@@ -10986,7 +11038,7 @@
                       <a:tailEnd type="none" w="med" len="med"/>
                     </a:lnB>
                     <a:solidFill>
-                      <a:srgbClr val="0B0B0B"/>
+                      <a:srgbClr val="0E2238"/>
                     </a:solidFill>
                   </a:tcPr>
                 </a:tc>
@@ -11003,7 +11055,7 @@
                       <a:r>
                         <a:rPr lang="en-US" sz="1050" dirty="0">
                           <a:solidFill>
-                            <a:srgbClr val="2A2D33"/>
+                            <a:srgbClr val="1F3A52"/>
                           </a:solidFill>
                           <a:latin typeface="+mn-lt" pitchFamily="34" charset="0"/>
                           <a:ea typeface="+mn-lt" pitchFamily="34" charset="-122"/>
@@ -11021,7 +11073,7 @@
                   <a:tcPr marL="91440" marR="91440" marT="45720" marB="45720" anchor="ctr">
                     <a:lnL w="6350" cap="flat" cmpd="sng" algn="ctr">
                       <a:solidFill>
-                        <a:srgbClr val="E9E4DA"/>
+                        <a:srgbClr val="E6E1D8"/>
                       </a:solidFill>
                       <a:prstDash val="solid"/>
                       <a:round/>
@@ -11030,7 +11082,7 @@
                     </a:lnL>
                     <a:lnR w="6350" cap="flat" cmpd="sng" algn="ctr">
                       <a:solidFill>
-                        <a:srgbClr val="E9E4DA"/>
+                        <a:srgbClr val="E6E1D8"/>
                       </a:solidFill>
                       <a:prstDash val="solid"/>
                       <a:round/>
@@ -11039,7 +11091,7 @@
                     </a:lnR>
                     <a:lnT w="6350" cap="flat" cmpd="sng" algn="ctr">
                       <a:solidFill>
-                        <a:srgbClr val="E9E4DA"/>
+                        <a:srgbClr val="E6E1D8"/>
                       </a:solidFill>
                       <a:prstDash val="solid"/>
                       <a:round/>
@@ -11048,7 +11100,7 @@
                     </a:lnT>
                     <a:lnB w="6350" cap="flat" cmpd="sng" algn="ctr">
                       <a:solidFill>
-                        <a:srgbClr val="E9E4DA"/>
+                        <a:srgbClr val="E6E1D8"/>
                       </a:solidFill>
                       <a:prstDash val="solid"/>
                       <a:round/>
@@ -11056,7 +11108,7 @@
                       <a:tailEnd type="none" w="med" len="med"/>
                     </a:lnB>
                     <a:solidFill>
-                      <a:srgbClr val="F4F1EA"/>
+                      <a:srgbClr val="F4F1EB"/>
                     </a:solidFill>
                   </a:tcPr>
                 </a:tc>
@@ -11071,7 +11123,7 @@
                       <a:r>
                         <a:rPr lang="en-US" sz="1050" dirty="0">
                           <a:solidFill>
-                            <a:srgbClr val="2A2D33"/>
+                            <a:srgbClr val="1F3A52"/>
                           </a:solidFill>
                           <a:latin typeface="+mn-lt" pitchFamily="34" charset="0"/>
                           <a:ea typeface="+mn-lt" pitchFamily="34" charset="-122"/>
@@ -11089,7 +11141,7 @@
                   <a:tcPr marL="91440" marR="91440" marT="45720" marB="45720" anchor="ctr">
                     <a:lnL w="6350" cap="flat" cmpd="sng" algn="ctr">
                       <a:solidFill>
-                        <a:srgbClr val="E9E4DA"/>
+                        <a:srgbClr val="E6E1D8"/>
                       </a:solidFill>
                       <a:prstDash val="solid"/>
                       <a:round/>
@@ -11098,7 +11150,7 @@
                     </a:lnL>
                     <a:lnR w="6350" cap="flat" cmpd="sng" algn="ctr">
                       <a:solidFill>
-                        <a:srgbClr val="E9E4DA"/>
+                        <a:srgbClr val="E6E1D8"/>
                       </a:solidFill>
                       <a:prstDash val="solid"/>
                       <a:round/>
@@ -11107,7 +11159,7 @@
                     </a:lnR>
                     <a:lnT w="6350" cap="flat" cmpd="sng" algn="ctr">
                       <a:solidFill>
-                        <a:srgbClr val="E9E4DA"/>
+                        <a:srgbClr val="E6E1D8"/>
                       </a:solidFill>
                       <a:prstDash val="solid"/>
                       <a:round/>
@@ -11116,7 +11168,7 @@
                     </a:lnT>
                     <a:lnB w="6350" cap="flat" cmpd="sng" algn="ctr">
                       <a:solidFill>
-                        <a:srgbClr val="E9E4DA"/>
+                        <a:srgbClr val="E6E1D8"/>
                       </a:solidFill>
                       <a:prstDash val="solid"/>
                       <a:round/>
@@ -11124,7 +11176,7 @@
                       <a:tailEnd type="none" w="med" len="med"/>
                     </a:lnB>
                     <a:solidFill>
-                      <a:srgbClr val="F4F1EA"/>
+                      <a:srgbClr val="F4F1EB"/>
                     </a:solidFill>
                   </a:tcPr>
                 </a:tc>
@@ -11139,7 +11191,7 @@
                       <a:r>
                         <a:rPr lang="en-US" sz="1050" b="1" dirty="0">
                           <a:solidFill>
-                            <a:srgbClr val="0B0B0B"/>
+                            <a:srgbClr val="0E2238"/>
                           </a:solidFill>
                           <a:latin typeface="+mn-lt" pitchFamily="34" charset="0"/>
                           <a:ea typeface="+mn-lt" pitchFamily="34" charset="-122"/>
@@ -11157,7 +11209,7 @@
                   <a:tcPr marL="91440" marR="91440" marT="45720" marB="45720" anchor="ctr">
                     <a:lnL w="6350" cap="flat" cmpd="sng" algn="ctr">
                       <a:solidFill>
-                        <a:srgbClr val="E9E4DA"/>
+                        <a:srgbClr val="E6E1D8"/>
                       </a:solidFill>
                       <a:prstDash val="solid"/>
                       <a:round/>
@@ -11166,7 +11218,7 @@
                     </a:lnL>
                     <a:lnR w="6350" cap="flat" cmpd="sng" algn="ctr">
                       <a:solidFill>
-                        <a:srgbClr val="E9E4DA"/>
+                        <a:srgbClr val="E6E1D8"/>
                       </a:solidFill>
                       <a:prstDash val="solid"/>
                       <a:round/>
@@ -11175,7 +11227,7 @@
                     </a:lnR>
                     <a:lnT w="6350" cap="flat" cmpd="sng" algn="ctr">
                       <a:solidFill>
-                        <a:srgbClr val="E9E4DA"/>
+                        <a:srgbClr val="E6E1D8"/>
                       </a:solidFill>
                       <a:prstDash val="solid"/>
                       <a:round/>
@@ -11184,7 +11236,7 @@
                     </a:lnT>
                     <a:lnB w="6350" cap="flat" cmpd="sng" algn="ctr">
                       <a:solidFill>
-                        <a:srgbClr val="E9E4DA"/>
+                        <a:srgbClr val="E6E1D8"/>
                       </a:solidFill>
                       <a:prstDash val="solid"/>
                       <a:round/>
@@ -11192,7 +11244,7 @@
                       <a:tailEnd type="none" w="med" len="med"/>
                     </a:lnB>
                     <a:solidFill>
-                      <a:srgbClr val="F4F1EA"/>
+                      <a:srgbClr val="F4F1EB"/>
                     </a:solidFill>
                   </a:tcPr>
                 </a:tc>
@@ -11209,7 +11261,7 @@
                       <a:r>
                         <a:rPr lang="en-US" sz="1050" dirty="0">
                           <a:solidFill>
-                            <a:srgbClr val="2A2D33"/>
+                            <a:srgbClr val="1F3A52"/>
                           </a:solidFill>
                           <a:latin typeface="+mn-lt" pitchFamily="34" charset="0"/>
                           <a:ea typeface="+mn-lt" pitchFamily="34" charset="-122"/>
@@ -11227,7 +11279,7 @@
                   <a:tcPr marL="91440" marR="91440" marT="45720" marB="45720" anchor="ctr">
                     <a:lnL w="6350" cap="flat" cmpd="sng" algn="ctr">
                       <a:solidFill>
-                        <a:srgbClr val="E9E4DA"/>
+                        <a:srgbClr val="E6E1D8"/>
                       </a:solidFill>
                       <a:prstDash val="solid"/>
                       <a:round/>
@@ -11236,7 +11288,7 @@
                     </a:lnL>
                     <a:lnR w="6350" cap="flat" cmpd="sng" algn="ctr">
                       <a:solidFill>
-                        <a:srgbClr val="E9E4DA"/>
+                        <a:srgbClr val="E6E1D8"/>
                       </a:solidFill>
                       <a:prstDash val="solid"/>
                       <a:round/>
@@ -11245,7 +11297,7 @@
                     </a:lnR>
                     <a:lnT w="6350" cap="flat" cmpd="sng" algn="ctr">
                       <a:solidFill>
-                        <a:srgbClr val="E9E4DA"/>
+                        <a:srgbClr val="E6E1D8"/>
                       </a:solidFill>
                       <a:prstDash val="solid"/>
                       <a:round/>
@@ -11254,7 +11306,7 @@
                     </a:lnT>
                     <a:lnB w="6350" cap="flat" cmpd="sng" algn="ctr">
                       <a:solidFill>
-                        <a:srgbClr val="E9E4DA"/>
+                        <a:srgbClr val="E6E1D8"/>
                       </a:solidFill>
                       <a:prstDash val="solid"/>
                       <a:round/>
@@ -11277,7 +11329,7 @@
                       <a:r>
                         <a:rPr lang="en-US" sz="1050" dirty="0">
                           <a:solidFill>
-                            <a:srgbClr val="2A2D33"/>
+                            <a:srgbClr val="1F3A52"/>
                           </a:solidFill>
                           <a:latin typeface="+mn-lt" pitchFamily="34" charset="0"/>
                           <a:ea typeface="+mn-lt" pitchFamily="34" charset="-122"/>
@@ -11295,7 +11347,7 @@
                   <a:tcPr marL="91440" marR="91440" marT="45720" marB="45720" anchor="ctr">
                     <a:lnL w="6350" cap="flat" cmpd="sng" algn="ctr">
                       <a:solidFill>
-                        <a:srgbClr val="E9E4DA"/>
+                        <a:srgbClr val="E6E1D8"/>
                       </a:solidFill>
                       <a:prstDash val="solid"/>
                       <a:round/>
@@ -11304,7 +11356,7 @@
                     </a:lnL>
                     <a:lnR w="6350" cap="flat" cmpd="sng" algn="ctr">
                       <a:solidFill>
-                        <a:srgbClr val="E9E4DA"/>
+                        <a:srgbClr val="E6E1D8"/>
                       </a:solidFill>
                       <a:prstDash val="solid"/>
                       <a:round/>
@@ -11313,7 +11365,7 @@
                     </a:lnR>
                     <a:lnT w="6350" cap="flat" cmpd="sng" algn="ctr">
                       <a:solidFill>
-                        <a:srgbClr val="E9E4DA"/>
+                        <a:srgbClr val="E6E1D8"/>
                       </a:solidFill>
                       <a:prstDash val="solid"/>
                       <a:round/>
@@ -11322,7 +11374,7 @@
                     </a:lnT>
                     <a:lnB w="6350" cap="flat" cmpd="sng" algn="ctr">
                       <a:solidFill>
-                        <a:srgbClr val="E9E4DA"/>
+                        <a:srgbClr val="E6E1D8"/>
                       </a:solidFill>
                       <a:prstDash val="solid"/>
                       <a:round/>
@@ -11345,7 +11397,7 @@
                       <a:r>
                         <a:rPr lang="en-US" sz="1050" b="1" dirty="0">
                           <a:solidFill>
-                            <a:srgbClr val="0B0B0B"/>
+                            <a:srgbClr val="0E2238"/>
                           </a:solidFill>
                           <a:latin typeface="+mn-lt" pitchFamily="34" charset="0"/>
                           <a:ea typeface="+mn-lt" pitchFamily="34" charset="-122"/>
@@ -11363,7 +11415,7 @@
                   <a:tcPr marL="91440" marR="91440" marT="45720" marB="45720" anchor="ctr">
                     <a:lnL w="6350" cap="flat" cmpd="sng" algn="ctr">
                       <a:solidFill>
-                        <a:srgbClr val="E9E4DA"/>
+                        <a:srgbClr val="E6E1D8"/>
                       </a:solidFill>
                       <a:prstDash val="solid"/>
                       <a:round/>
@@ -11372,7 +11424,7 @@
                     </a:lnL>
                     <a:lnR w="6350" cap="flat" cmpd="sng" algn="ctr">
                       <a:solidFill>
-                        <a:srgbClr val="E9E4DA"/>
+                        <a:srgbClr val="E6E1D8"/>
                       </a:solidFill>
                       <a:prstDash val="solid"/>
                       <a:round/>
@@ -11381,7 +11433,7 @@
                     </a:lnR>
                     <a:lnT w="6350" cap="flat" cmpd="sng" algn="ctr">
                       <a:solidFill>
-                        <a:srgbClr val="E9E4DA"/>
+                        <a:srgbClr val="E6E1D8"/>
                       </a:solidFill>
                       <a:prstDash val="solid"/>
                       <a:round/>
@@ -11390,7 +11442,7 @@
                     </a:lnT>
                     <a:lnB w="6350" cap="flat" cmpd="sng" algn="ctr">
                       <a:solidFill>
-                        <a:srgbClr val="E9E4DA"/>
+                        <a:srgbClr val="E6E1D8"/>
                       </a:solidFill>
                       <a:prstDash val="solid"/>
                       <a:round/>
@@ -11415,7 +11467,7 @@
                       <a:r>
                         <a:rPr lang="en-US" sz="1050" dirty="0">
                           <a:solidFill>
-                            <a:srgbClr val="2A2D33"/>
+                            <a:srgbClr val="1F3A52"/>
                           </a:solidFill>
                           <a:latin typeface="+mn-lt" pitchFamily="34" charset="0"/>
                           <a:ea typeface="+mn-lt" pitchFamily="34" charset="-122"/>
@@ -11433,7 +11485,7 @@
                   <a:tcPr marL="91440" marR="91440" marT="45720" marB="45720" anchor="ctr">
                     <a:lnL w="6350" cap="flat" cmpd="sng" algn="ctr">
                       <a:solidFill>
-                        <a:srgbClr val="E9E4DA"/>
+                        <a:srgbClr val="E6E1D8"/>
                       </a:solidFill>
                       <a:prstDash val="solid"/>
                       <a:round/>
@@ -11442,7 +11494,7 @@
                     </a:lnL>
                     <a:lnR w="6350" cap="flat" cmpd="sng" algn="ctr">
                       <a:solidFill>
-                        <a:srgbClr val="E9E4DA"/>
+                        <a:srgbClr val="E6E1D8"/>
                       </a:solidFill>
                       <a:prstDash val="solid"/>
                       <a:round/>
@@ -11451,7 +11503,7 @@
                     </a:lnR>
                     <a:lnT w="6350" cap="flat" cmpd="sng" algn="ctr">
                       <a:solidFill>
-                        <a:srgbClr val="E9E4DA"/>
+                        <a:srgbClr val="E6E1D8"/>
                       </a:solidFill>
                       <a:prstDash val="solid"/>
                       <a:round/>
@@ -11460,7 +11512,7 @@
                     </a:lnT>
                     <a:lnB w="6350" cap="flat" cmpd="sng" algn="ctr">
                       <a:solidFill>
-                        <a:srgbClr val="E9E4DA"/>
+                        <a:srgbClr val="E6E1D8"/>
                       </a:solidFill>
                       <a:prstDash val="solid"/>
                       <a:round/>
@@ -11468,7 +11520,7 @@
                       <a:tailEnd type="none" w="med" len="med"/>
                     </a:lnB>
                     <a:solidFill>
-                      <a:srgbClr val="F4F1EA"/>
+                      <a:srgbClr val="F4F1EB"/>
                     </a:solidFill>
                   </a:tcPr>
                 </a:tc>
@@ -11483,7 +11535,7 @@
                       <a:r>
                         <a:rPr lang="en-US" sz="1050" dirty="0">
                           <a:solidFill>
-                            <a:srgbClr val="2A2D33"/>
+                            <a:srgbClr val="1F3A52"/>
                           </a:solidFill>
                           <a:latin typeface="+mn-lt" pitchFamily="34" charset="0"/>
                           <a:ea typeface="+mn-lt" pitchFamily="34" charset="-122"/>
@@ -11501,7 +11553,7 @@
                   <a:tcPr marL="91440" marR="91440" marT="45720" marB="45720" anchor="ctr">
                     <a:lnL w="6350" cap="flat" cmpd="sng" algn="ctr">
                       <a:solidFill>
-                        <a:srgbClr val="E9E4DA"/>
+                        <a:srgbClr val="E6E1D8"/>
                       </a:solidFill>
                       <a:prstDash val="solid"/>
                       <a:round/>
@@ -11510,7 +11562,7 @@
                     </a:lnL>
                     <a:lnR w="6350" cap="flat" cmpd="sng" algn="ctr">
                       <a:solidFill>
-                        <a:srgbClr val="E9E4DA"/>
+                        <a:srgbClr val="E6E1D8"/>
                       </a:solidFill>
                       <a:prstDash val="solid"/>
                       <a:round/>
@@ -11519,7 +11571,7 @@
                     </a:lnR>
                     <a:lnT w="6350" cap="flat" cmpd="sng" algn="ctr">
                       <a:solidFill>
-                        <a:srgbClr val="E9E4DA"/>
+                        <a:srgbClr val="E6E1D8"/>
                       </a:solidFill>
                       <a:prstDash val="solid"/>
                       <a:round/>
@@ -11528,7 +11580,7 @@
                     </a:lnT>
                     <a:lnB w="6350" cap="flat" cmpd="sng" algn="ctr">
                       <a:solidFill>
-                        <a:srgbClr val="E9E4DA"/>
+                        <a:srgbClr val="E6E1D8"/>
                       </a:solidFill>
                       <a:prstDash val="solid"/>
                       <a:round/>
@@ -11536,7 +11588,7 @@
                       <a:tailEnd type="none" w="med" len="med"/>
                     </a:lnB>
                     <a:solidFill>
-                      <a:srgbClr val="F4F1EA"/>
+                      <a:srgbClr val="F4F1EB"/>
                     </a:solidFill>
                   </a:tcPr>
                 </a:tc>
@@ -11551,7 +11603,7 @@
                       <a:r>
                         <a:rPr lang="en-US" sz="1050" b="1" dirty="0">
                           <a:solidFill>
-                            <a:srgbClr val="0B0B0B"/>
+                            <a:srgbClr val="0E2238"/>
                           </a:solidFill>
                           <a:latin typeface="+mn-lt" pitchFamily="34" charset="0"/>
                           <a:ea typeface="+mn-lt" pitchFamily="34" charset="-122"/>
@@ -11569,7 +11621,7 @@
                   <a:tcPr marL="91440" marR="91440" marT="45720" marB="45720" anchor="ctr">
                     <a:lnL w="6350" cap="flat" cmpd="sng" algn="ctr">
                       <a:solidFill>
-                        <a:srgbClr val="E9E4DA"/>
+                        <a:srgbClr val="E6E1D8"/>
                       </a:solidFill>
                       <a:prstDash val="solid"/>
                       <a:round/>
@@ -11578,7 +11630,7 @@
                     </a:lnL>
                     <a:lnR w="6350" cap="flat" cmpd="sng" algn="ctr">
                       <a:solidFill>
-                        <a:srgbClr val="E9E4DA"/>
+                        <a:srgbClr val="E6E1D8"/>
                       </a:solidFill>
                       <a:prstDash val="solid"/>
                       <a:round/>
@@ -11587,7 +11639,7 @@
                     </a:lnR>
                     <a:lnT w="6350" cap="flat" cmpd="sng" algn="ctr">
                       <a:solidFill>
-                        <a:srgbClr val="E9E4DA"/>
+                        <a:srgbClr val="E6E1D8"/>
                       </a:solidFill>
                       <a:prstDash val="solid"/>
                       <a:round/>
@@ -11596,7 +11648,7 @@
                     </a:lnT>
                     <a:lnB w="6350" cap="flat" cmpd="sng" algn="ctr">
                       <a:solidFill>
-                        <a:srgbClr val="E9E4DA"/>
+                        <a:srgbClr val="E6E1D8"/>
                       </a:solidFill>
                       <a:prstDash val="solid"/>
                       <a:round/>
@@ -11604,7 +11656,7 @@
                       <a:tailEnd type="none" w="med" len="med"/>
                     </a:lnB>
                     <a:solidFill>
-                      <a:srgbClr val="F4F1EA"/>
+                      <a:srgbClr val="F4F1EB"/>
                     </a:solidFill>
                   </a:tcPr>
                 </a:tc>
@@ -11621,7 +11673,7 @@
                       <a:r>
                         <a:rPr lang="en-US" sz="1050" dirty="0">
                           <a:solidFill>
-                            <a:srgbClr val="2A2D33"/>
+                            <a:srgbClr val="1F3A52"/>
                           </a:solidFill>
                           <a:latin typeface="+mn-lt" pitchFamily="34" charset="0"/>
                           <a:ea typeface="+mn-lt" pitchFamily="34" charset="-122"/>
@@ -11639,7 +11691,7 @@
                   <a:tcPr marL="91440" marR="91440" marT="45720" marB="45720" anchor="ctr">
                     <a:lnL w="6350" cap="flat" cmpd="sng" algn="ctr">
                       <a:solidFill>
-                        <a:srgbClr val="E9E4DA"/>
+                        <a:srgbClr val="E6E1D8"/>
                       </a:solidFill>
                       <a:prstDash val="solid"/>
                       <a:round/>
@@ -11648,7 +11700,7 @@
                     </a:lnL>
                     <a:lnR w="6350" cap="flat" cmpd="sng" algn="ctr">
                       <a:solidFill>
-                        <a:srgbClr val="E9E4DA"/>
+                        <a:srgbClr val="E6E1D8"/>
                       </a:solidFill>
                       <a:prstDash val="solid"/>
                       <a:round/>
@@ -11657,7 +11709,7 @@
                     </a:lnR>
                     <a:lnT w="6350" cap="flat" cmpd="sng" algn="ctr">
                       <a:solidFill>
-                        <a:srgbClr val="E9E4DA"/>
+                        <a:srgbClr val="E6E1D8"/>
                       </a:solidFill>
                       <a:prstDash val="solid"/>
                       <a:round/>
@@ -11666,7 +11718,7 @@
                     </a:lnT>
                     <a:lnB w="6350" cap="flat" cmpd="sng" algn="ctr">
                       <a:solidFill>
-                        <a:srgbClr val="E9E4DA"/>
+                        <a:srgbClr val="E6E1D8"/>
                       </a:solidFill>
                       <a:prstDash val="solid"/>
                       <a:round/>
@@ -11689,7 +11741,7 @@
                       <a:r>
                         <a:rPr lang="en-US" sz="1050" dirty="0">
                           <a:solidFill>
-                            <a:srgbClr val="2A2D33"/>
+                            <a:srgbClr val="1F3A52"/>
                           </a:solidFill>
                           <a:latin typeface="+mn-lt" pitchFamily="34" charset="0"/>
                           <a:ea typeface="+mn-lt" pitchFamily="34" charset="-122"/>
@@ -11707,7 +11759,7 @@
                   <a:tcPr marL="91440" marR="91440" marT="45720" marB="45720" anchor="ctr">
                     <a:lnL w="6350" cap="flat" cmpd="sng" algn="ctr">
                       <a:solidFill>
-                        <a:srgbClr val="E9E4DA"/>
+                        <a:srgbClr val="E6E1D8"/>
                       </a:solidFill>
                       <a:prstDash val="solid"/>
                       <a:round/>
@@ -11716,7 +11768,7 @@
                     </a:lnL>
                     <a:lnR w="6350" cap="flat" cmpd="sng" algn="ctr">
                       <a:solidFill>
-                        <a:srgbClr val="E9E4DA"/>
+                        <a:srgbClr val="E6E1D8"/>
                       </a:solidFill>
                       <a:prstDash val="solid"/>
                       <a:round/>
@@ -11725,7 +11777,7 @@
                     </a:lnR>
                     <a:lnT w="6350" cap="flat" cmpd="sng" algn="ctr">
                       <a:solidFill>
-                        <a:srgbClr val="E9E4DA"/>
+                        <a:srgbClr val="E6E1D8"/>
                       </a:solidFill>
                       <a:prstDash val="solid"/>
                       <a:round/>
@@ -11734,7 +11786,7 @@
                     </a:lnT>
                     <a:lnB w="6350" cap="flat" cmpd="sng" algn="ctr">
                       <a:solidFill>
-                        <a:srgbClr val="E9E4DA"/>
+                        <a:srgbClr val="E6E1D8"/>
                       </a:solidFill>
                       <a:prstDash val="solid"/>
                       <a:round/>
@@ -11757,7 +11809,7 @@
                       <a:r>
                         <a:rPr lang="en-US" sz="1050" b="1" dirty="0">
                           <a:solidFill>
-                            <a:srgbClr val="0B0B0B"/>
+                            <a:srgbClr val="0E2238"/>
                           </a:solidFill>
                           <a:latin typeface="+mn-lt" pitchFamily="34" charset="0"/>
                           <a:ea typeface="+mn-lt" pitchFamily="34" charset="-122"/>
@@ -11775,7 +11827,7 @@
                   <a:tcPr marL="91440" marR="91440" marT="45720" marB="45720" anchor="ctr">
                     <a:lnL w="6350" cap="flat" cmpd="sng" algn="ctr">
                       <a:solidFill>
-                        <a:srgbClr val="E9E4DA"/>
+                        <a:srgbClr val="E6E1D8"/>
                       </a:solidFill>
                       <a:prstDash val="solid"/>
                       <a:round/>
@@ -11784,7 +11836,7 @@
                     </a:lnL>
                     <a:lnR w="6350" cap="flat" cmpd="sng" algn="ctr">
                       <a:solidFill>
-                        <a:srgbClr val="E9E4DA"/>
+                        <a:srgbClr val="E6E1D8"/>
                       </a:solidFill>
                       <a:prstDash val="solid"/>
                       <a:round/>
@@ -11793,7 +11845,7 @@
                     </a:lnR>
                     <a:lnT w="6350" cap="flat" cmpd="sng" algn="ctr">
                       <a:solidFill>
-                        <a:srgbClr val="E9E4DA"/>
+                        <a:srgbClr val="E6E1D8"/>
                       </a:solidFill>
                       <a:prstDash val="solid"/>
                       <a:round/>
@@ -11802,7 +11854,7 @@
                     </a:lnT>
                     <a:lnB w="6350" cap="flat" cmpd="sng" algn="ctr">
                       <a:solidFill>
-                        <a:srgbClr val="E9E4DA"/>
+                        <a:srgbClr val="E6E1D8"/>
                       </a:solidFill>
                       <a:prstDash val="solid"/>
                       <a:round/>
@@ -11827,7 +11879,7 @@
                       <a:r>
                         <a:rPr lang="en-US" sz="1050" dirty="0">
                           <a:solidFill>
-                            <a:srgbClr val="2A2D33"/>
+                            <a:srgbClr val="1F3A52"/>
                           </a:solidFill>
                           <a:latin typeface="+mn-lt" pitchFamily="34" charset="0"/>
                           <a:ea typeface="+mn-lt" pitchFamily="34" charset="-122"/>
@@ -11845,7 +11897,7 @@
                   <a:tcPr marL="91440" marR="91440" marT="45720" marB="45720" anchor="ctr">
                     <a:lnL w="6350" cap="flat" cmpd="sng" algn="ctr">
                       <a:solidFill>
-                        <a:srgbClr val="E9E4DA"/>
+                        <a:srgbClr val="E6E1D8"/>
                       </a:solidFill>
                       <a:prstDash val="solid"/>
                       <a:round/>
@@ -11854,7 +11906,7 @@
                     </a:lnL>
                     <a:lnR w="6350" cap="flat" cmpd="sng" algn="ctr">
                       <a:solidFill>
-                        <a:srgbClr val="E9E4DA"/>
+                        <a:srgbClr val="E6E1D8"/>
                       </a:solidFill>
                       <a:prstDash val="solid"/>
                       <a:round/>
@@ -11863,7 +11915,7 @@
                     </a:lnR>
                     <a:lnT w="6350" cap="flat" cmpd="sng" algn="ctr">
                       <a:solidFill>
-                        <a:srgbClr val="E9E4DA"/>
+                        <a:srgbClr val="E6E1D8"/>
                       </a:solidFill>
                       <a:prstDash val="solid"/>
                       <a:round/>
@@ -11872,7 +11924,7 @@
                     </a:lnT>
                     <a:lnB w="6350" cap="flat" cmpd="sng" algn="ctr">
                       <a:solidFill>
-                        <a:srgbClr val="E9E4DA"/>
+                        <a:srgbClr val="E6E1D8"/>
                       </a:solidFill>
                       <a:prstDash val="solid"/>
                       <a:round/>
@@ -11880,7 +11932,7 @@
                       <a:tailEnd type="none" w="med" len="med"/>
                     </a:lnB>
                     <a:solidFill>
-                      <a:srgbClr val="F4F1EA"/>
+                      <a:srgbClr val="F4F1EB"/>
                     </a:solidFill>
                   </a:tcPr>
                 </a:tc>
@@ -11895,7 +11947,7 @@
                       <a:r>
                         <a:rPr lang="en-US" sz="1050" dirty="0">
                           <a:solidFill>
-                            <a:srgbClr val="2A2D33"/>
+                            <a:srgbClr val="1F3A52"/>
                           </a:solidFill>
                           <a:latin typeface="+mn-lt" pitchFamily="34" charset="0"/>
                           <a:ea typeface="+mn-lt" pitchFamily="34" charset="-122"/>
@@ -11913,7 +11965,7 @@
                   <a:tcPr marL="91440" marR="91440" marT="45720" marB="45720" anchor="ctr">
                     <a:lnL w="6350" cap="flat" cmpd="sng" algn="ctr">
                       <a:solidFill>
-                        <a:srgbClr val="E9E4DA"/>
+                        <a:srgbClr val="E6E1D8"/>
                       </a:solidFill>
                       <a:prstDash val="solid"/>
                       <a:round/>
@@ -11922,7 +11974,7 @@
                     </a:lnL>
                     <a:lnR w="6350" cap="flat" cmpd="sng" algn="ctr">
                       <a:solidFill>
-                        <a:srgbClr val="E9E4DA"/>
+                        <a:srgbClr val="E6E1D8"/>
                       </a:solidFill>
                       <a:prstDash val="solid"/>
                       <a:round/>
@@ -11931,7 +11983,7 @@
                     </a:lnR>
                     <a:lnT w="6350" cap="flat" cmpd="sng" algn="ctr">
                       <a:solidFill>
-                        <a:srgbClr val="E9E4DA"/>
+                        <a:srgbClr val="E6E1D8"/>
                       </a:solidFill>
                       <a:prstDash val="solid"/>
                       <a:round/>
@@ -11940,7 +11992,7 @@
                     </a:lnT>
                     <a:lnB w="6350" cap="flat" cmpd="sng" algn="ctr">
                       <a:solidFill>
-                        <a:srgbClr val="E9E4DA"/>
+                        <a:srgbClr val="E6E1D8"/>
                       </a:solidFill>
                       <a:prstDash val="solid"/>
                       <a:round/>
@@ -11948,7 +12000,7 @@
                       <a:tailEnd type="none" w="med" len="med"/>
                     </a:lnB>
                     <a:solidFill>
-                      <a:srgbClr val="F4F1EA"/>
+                      <a:srgbClr val="F4F1EB"/>
                     </a:solidFill>
                   </a:tcPr>
                 </a:tc>
@@ -11963,7 +12015,7 @@
                       <a:r>
                         <a:rPr lang="en-US" sz="1050" b="1" dirty="0">
                           <a:solidFill>
-                            <a:srgbClr val="0B0B0B"/>
+                            <a:srgbClr val="0E2238"/>
                           </a:solidFill>
                           <a:latin typeface="+mn-lt" pitchFamily="34" charset="0"/>
                           <a:ea typeface="+mn-lt" pitchFamily="34" charset="-122"/>
@@ -11981,7 +12033,7 @@
                   <a:tcPr marL="91440" marR="91440" marT="45720" marB="45720" anchor="ctr">
                     <a:lnL w="6350" cap="flat" cmpd="sng" algn="ctr">
                       <a:solidFill>
-                        <a:srgbClr val="E9E4DA"/>
+                        <a:srgbClr val="E6E1D8"/>
                       </a:solidFill>
                       <a:prstDash val="solid"/>
                       <a:round/>
@@ -11990,7 +12042,7 @@
                     </a:lnL>
                     <a:lnR w="6350" cap="flat" cmpd="sng" algn="ctr">
                       <a:solidFill>
-                        <a:srgbClr val="E9E4DA"/>
+                        <a:srgbClr val="E6E1D8"/>
                       </a:solidFill>
                       <a:prstDash val="solid"/>
                       <a:round/>
@@ -11999,7 +12051,7 @@
                     </a:lnR>
                     <a:lnT w="6350" cap="flat" cmpd="sng" algn="ctr">
                       <a:solidFill>
-                        <a:srgbClr val="E9E4DA"/>
+                        <a:srgbClr val="E6E1D8"/>
                       </a:solidFill>
                       <a:prstDash val="solid"/>
                       <a:round/>
@@ -12008,7 +12060,7 @@
                     </a:lnT>
                     <a:lnB w="6350" cap="flat" cmpd="sng" algn="ctr">
                       <a:solidFill>
-                        <a:srgbClr val="E9E4DA"/>
+                        <a:srgbClr val="E6E1D8"/>
                       </a:solidFill>
                       <a:prstDash val="solid"/>
                       <a:round/>
@@ -12016,7 +12068,7 @@
                       <a:tailEnd type="none" w="med" len="med"/>
                     </a:lnB>
                     <a:solidFill>
-                      <a:srgbClr val="F4F1EA"/>
+                      <a:srgbClr val="F4F1EB"/>
                     </a:solidFill>
                   </a:tcPr>
                 </a:tc>
@@ -12033,7 +12085,7 @@
                       <a:r>
                         <a:rPr lang="en-US" sz="1050" dirty="0">
                           <a:solidFill>
-                            <a:srgbClr val="2A2D33"/>
+                            <a:srgbClr val="1F3A52"/>
                           </a:solidFill>
                           <a:latin typeface="+mn-lt" pitchFamily="34" charset="0"/>
                           <a:ea typeface="+mn-lt" pitchFamily="34" charset="-122"/>
@@ -12051,7 +12103,7 @@
                   <a:tcPr marL="91440" marR="91440" marT="45720" marB="45720" anchor="ctr">
                     <a:lnL w="6350" cap="flat" cmpd="sng" algn="ctr">
                       <a:solidFill>
-                        <a:srgbClr val="E9E4DA"/>
+                        <a:srgbClr val="E6E1D8"/>
                       </a:solidFill>
                       <a:prstDash val="solid"/>
                       <a:round/>
@@ -12060,7 +12112,7 @@
                     </a:lnL>
                     <a:lnR w="6350" cap="flat" cmpd="sng" algn="ctr">
                       <a:solidFill>
-                        <a:srgbClr val="E9E4DA"/>
+                        <a:srgbClr val="E6E1D8"/>
                       </a:solidFill>
                       <a:prstDash val="solid"/>
                       <a:round/>
@@ -12069,7 +12121,7 @@
                     </a:lnR>
                     <a:lnT w="6350" cap="flat" cmpd="sng" algn="ctr">
                       <a:solidFill>
-                        <a:srgbClr val="E9E4DA"/>
+                        <a:srgbClr val="E6E1D8"/>
                       </a:solidFill>
                       <a:prstDash val="solid"/>
                       <a:round/>
@@ -12078,7 +12130,7 @@
                     </a:lnT>
                     <a:lnB w="6350" cap="flat" cmpd="sng" algn="ctr">
                       <a:solidFill>
-                        <a:srgbClr val="E9E4DA"/>
+                        <a:srgbClr val="E6E1D8"/>
                       </a:solidFill>
                       <a:prstDash val="solid"/>
                       <a:round/>
@@ -12101,7 +12153,7 @@
                       <a:r>
                         <a:rPr lang="en-US" sz="1050" dirty="0">
                           <a:solidFill>
-                            <a:srgbClr val="2A2D33"/>
+                            <a:srgbClr val="1F3A52"/>
                           </a:solidFill>
                           <a:latin typeface="+mn-lt" pitchFamily="34" charset="0"/>
                           <a:ea typeface="+mn-lt" pitchFamily="34" charset="-122"/>
@@ -12119,7 +12171,7 @@
                   <a:tcPr marL="91440" marR="91440" marT="45720" marB="45720" anchor="ctr">
                     <a:lnL w="6350" cap="flat" cmpd="sng" algn="ctr">
                       <a:solidFill>
-                        <a:srgbClr val="E9E4DA"/>
+                        <a:srgbClr val="E6E1D8"/>
                       </a:solidFill>
                       <a:prstDash val="solid"/>
                       <a:round/>
@@ -12128,7 +12180,7 @@
                     </a:lnL>
                     <a:lnR w="6350" cap="flat" cmpd="sng" algn="ctr">
                       <a:solidFill>
-                        <a:srgbClr val="E9E4DA"/>
+                        <a:srgbClr val="E6E1D8"/>
                       </a:solidFill>
                       <a:prstDash val="solid"/>
                       <a:round/>
@@ -12137,7 +12189,7 @@
                     </a:lnR>
                     <a:lnT w="6350" cap="flat" cmpd="sng" algn="ctr">
                       <a:solidFill>
-                        <a:srgbClr val="E9E4DA"/>
+                        <a:srgbClr val="E6E1D8"/>
                       </a:solidFill>
                       <a:prstDash val="solid"/>
                       <a:round/>
@@ -12146,7 +12198,7 @@
                     </a:lnT>
                     <a:lnB w="6350" cap="flat" cmpd="sng" algn="ctr">
                       <a:solidFill>
-                        <a:srgbClr val="E9E4DA"/>
+                        <a:srgbClr val="E6E1D8"/>
                       </a:solidFill>
                       <a:prstDash val="solid"/>
                       <a:round/>
@@ -12169,7 +12221,7 @@
                       <a:r>
                         <a:rPr lang="en-US" sz="1050" b="1" dirty="0">
                           <a:solidFill>
-                            <a:srgbClr val="0B0B0B"/>
+                            <a:srgbClr val="0E2238"/>
                           </a:solidFill>
                           <a:latin typeface="+mn-lt" pitchFamily="34" charset="0"/>
                           <a:ea typeface="+mn-lt" pitchFamily="34" charset="-122"/>
@@ -12187,7 +12239,7 @@
                   <a:tcPr marL="91440" marR="91440" marT="45720" marB="45720" anchor="ctr">
                     <a:lnL w="6350" cap="flat" cmpd="sng" algn="ctr">
                       <a:solidFill>
-                        <a:srgbClr val="E9E4DA"/>
+                        <a:srgbClr val="E6E1D8"/>
                       </a:solidFill>
                       <a:prstDash val="solid"/>
                       <a:round/>
@@ -12196,7 +12248,7 @@
                     </a:lnL>
                     <a:lnR w="6350" cap="flat" cmpd="sng" algn="ctr">
                       <a:solidFill>
-                        <a:srgbClr val="E9E4DA"/>
+                        <a:srgbClr val="E6E1D8"/>
                       </a:solidFill>
                       <a:prstDash val="solid"/>
                       <a:round/>
@@ -12205,7 +12257,7 @@
                     </a:lnR>
                     <a:lnT w="6350" cap="flat" cmpd="sng" algn="ctr">
                       <a:solidFill>
-                        <a:srgbClr val="E9E4DA"/>
+                        <a:srgbClr val="E6E1D8"/>
                       </a:solidFill>
                       <a:prstDash val="solid"/>
                       <a:round/>
@@ -12214,7 +12266,7 @@
                     </a:lnT>
                     <a:lnB w="6350" cap="flat" cmpd="sng" algn="ctr">
                       <a:solidFill>
-                        <a:srgbClr val="E9E4DA"/>
+                        <a:srgbClr val="E6E1D8"/>
                       </a:solidFill>
                       <a:prstDash val="solid"/>
                       <a:round/>
@@ -12239,7 +12291,7 @@
                       <a:r>
                         <a:rPr lang="en-US" sz="1050" dirty="0">
                           <a:solidFill>
-                            <a:srgbClr val="2A2D33"/>
+                            <a:srgbClr val="1F3A52"/>
                           </a:solidFill>
                           <a:latin typeface="+mn-lt" pitchFamily="34" charset="0"/>
                           <a:ea typeface="+mn-lt" pitchFamily="34" charset="-122"/>
@@ -12257,7 +12309,7 @@
                   <a:tcPr marL="91440" marR="91440" marT="45720" marB="45720" anchor="ctr">
                     <a:lnL w="6350" cap="flat" cmpd="sng" algn="ctr">
                       <a:solidFill>
-                        <a:srgbClr val="E9E4DA"/>
+                        <a:srgbClr val="E6E1D8"/>
                       </a:solidFill>
                       <a:prstDash val="solid"/>
                       <a:round/>
@@ -12266,7 +12318,7 @@
                     </a:lnL>
                     <a:lnR w="6350" cap="flat" cmpd="sng" algn="ctr">
                       <a:solidFill>
-                        <a:srgbClr val="E9E4DA"/>
+                        <a:srgbClr val="E6E1D8"/>
                       </a:solidFill>
                       <a:prstDash val="solid"/>
                       <a:round/>
@@ -12275,7 +12327,7 @@
                     </a:lnR>
                     <a:lnT w="6350" cap="flat" cmpd="sng" algn="ctr">
                       <a:solidFill>
-                        <a:srgbClr val="E9E4DA"/>
+                        <a:srgbClr val="E6E1D8"/>
                       </a:solidFill>
                       <a:prstDash val="solid"/>
                       <a:round/>
@@ -12284,7 +12336,7 @@
                     </a:lnT>
                     <a:lnB w="6350" cap="flat" cmpd="sng" algn="ctr">
                       <a:solidFill>
-                        <a:srgbClr val="E9E4DA"/>
+                        <a:srgbClr val="E6E1D8"/>
                       </a:solidFill>
                       <a:prstDash val="solid"/>
                       <a:round/>
@@ -12292,7 +12344,7 @@
                       <a:tailEnd type="none" w="med" len="med"/>
                     </a:lnB>
                     <a:solidFill>
-                      <a:srgbClr val="F4F1EA"/>
+                      <a:srgbClr val="F4F1EB"/>
                     </a:solidFill>
                   </a:tcPr>
                 </a:tc>
@@ -12307,7 +12359,7 @@
                       <a:r>
                         <a:rPr lang="en-US" sz="1050" dirty="0">
                           <a:solidFill>
-                            <a:srgbClr val="2A2D33"/>
+                            <a:srgbClr val="1F3A52"/>
                           </a:solidFill>
                           <a:latin typeface="+mn-lt" pitchFamily="34" charset="0"/>
                           <a:ea typeface="+mn-lt" pitchFamily="34" charset="-122"/>
@@ -12325,7 +12377,7 @@
                   <a:tcPr marL="91440" marR="91440" marT="45720" marB="45720" anchor="ctr">
                     <a:lnL w="6350" cap="flat" cmpd="sng" algn="ctr">
                       <a:solidFill>
-                        <a:srgbClr val="E9E4DA"/>
+                        <a:srgbClr val="E6E1D8"/>
                       </a:solidFill>
                       <a:prstDash val="solid"/>
                       <a:round/>
@@ -12334,7 +12386,7 @@
                     </a:lnL>
                     <a:lnR w="6350" cap="flat" cmpd="sng" algn="ctr">
                       <a:solidFill>
-                        <a:srgbClr val="E9E4DA"/>
+                        <a:srgbClr val="E6E1D8"/>
                       </a:solidFill>
                       <a:prstDash val="solid"/>
                       <a:round/>
@@ -12343,7 +12395,7 @@
                     </a:lnR>
                     <a:lnT w="6350" cap="flat" cmpd="sng" algn="ctr">
                       <a:solidFill>
-                        <a:srgbClr val="E9E4DA"/>
+                        <a:srgbClr val="E6E1D8"/>
                       </a:solidFill>
                       <a:prstDash val="solid"/>
                       <a:round/>
@@ -12352,7 +12404,7 @@
                     </a:lnT>
                     <a:lnB w="6350" cap="flat" cmpd="sng" algn="ctr">
                       <a:solidFill>
-                        <a:srgbClr val="E9E4DA"/>
+                        <a:srgbClr val="E6E1D8"/>
                       </a:solidFill>
                       <a:prstDash val="solid"/>
                       <a:round/>
@@ -12360,7 +12412,7 @@
                       <a:tailEnd type="none" w="med" len="med"/>
                     </a:lnB>
                     <a:solidFill>
-                      <a:srgbClr val="F4F1EA"/>
+                      <a:srgbClr val="F4F1EB"/>
                     </a:solidFill>
                   </a:tcPr>
                 </a:tc>
@@ -12375,7 +12427,7 @@
                       <a:r>
                         <a:rPr lang="en-US" sz="1050" b="1" dirty="0">
                           <a:solidFill>
-                            <a:srgbClr val="0B0B0B"/>
+                            <a:srgbClr val="0E2238"/>
                           </a:solidFill>
                           <a:latin typeface="+mn-lt" pitchFamily="34" charset="0"/>
                           <a:ea typeface="+mn-lt" pitchFamily="34" charset="-122"/>
@@ -12393,7 +12445,7 @@
                   <a:tcPr marL="91440" marR="91440" marT="45720" marB="45720" anchor="ctr">
                     <a:lnL w="6350" cap="flat" cmpd="sng" algn="ctr">
                       <a:solidFill>
-                        <a:srgbClr val="E9E4DA"/>
+                        <a:srgbClr val="E6E1D8"/>
                       </a:solidFill>
                       <a:prstDash val="solid"/>
                       <a:round/>
@@ -12402,7 +12454,7 @@
                     </a:lnL>
                     <a:lnR w="6350" cap="flat" cmpd="sng" algn="ctr">
                       <a:solidFill>
-                        <a:srgbClr val="E9E4DA"/>
+                        <a:srgbClr val="E6E1D8"/>
                       </a:solidFill>
                       <a:prstDash val="solid"/>
                       <a:round/>
@@ -12411,7 +12463,7 @@
                     </a:lnR>
                     <a:lnT w="6350" cap="flat" cmpd="sng" algn="ctr">
                       <a:solidFill>
-                        <a:srgbClr val="E9E4DA"/>
+                        <a:srgbClr val="E6E1D8"/>
                       </a:solidFill>
                       <a:prstDash val="solid"/>
                       <a:round/>
@@ -12420,7 +12472,7 @@
                     </a:lnT>
                     <a:lnB w="6350" cap="flat" cmpd="sng" algn="ctr">
                       <a:solidFill>
-                        <a:srgbClr val="E9E4DA"/>
+                        <a:srgbClr val="E6E1D8"/>
                       </a:solidFill>
                       <a:prstDash val="solid"/>
                       <a:round/>
@@ -12428,7 +12480,7 @@
                       <a:tailEnd type="none" w="med" len="med"/>
                     </a:lnB>
                     <a:solidFill>
-                      <a:srgbClr val="F4F1EA"/>
+                      <a:srgbClr val="F4F1EB"/>
                     </a:solidFill>
                   </a:tcPr>
                 </a:tc>
@@ -12439,6 +12491,36 @@
       </p:graphicFrame>
       <p:sp>
         <p:nvSpPr>
+          <p:cNvPr id="5" name="Text 0"/>
+          <p:cNvSpPr/>
+          <p:nvPr>
+            <p:ph idx="101" type="title" hasCustomPrompt="1"/>
+          </p:nvPr>
+        </p:nvSpPr>
+        <p:spPr>
+          <a:xfrm>
+            <a:off x="457200" y="420624"/>
+            <a:ext cx="8229600" cy="731520"/>
+          </a:xfrm>
+          <a:prstGeom prst="rect">
+            <a:avLst/>
+          </a:prstGeom>
+          <a:noFill/>
+          <a:ln/>
+        </p:spPr>
+        <p:txBody>
+          <a:bodyPr wrap="square" lIns="0" tIns="0" rIns="0" bIns="0" rtlCol="0" anchor="t"/>
+          <a:lstStyle/>
+          <a:p>
+            <a:pPr algn="r" indent="0" marL="0">
+              <a:buNone/>
+            </a:pPr>
+            <a:endParaRPr lang="en-US" sz="2600" dirty="0"/>
+          </a:p>
+        </p:txBody>
+      </p:sp>
+      <p:sp>
+        <p:nvSpPr>
           <p:cNvPr id="25" name="Slide Number Placeholder 0"/>
           <p:cNvSpPr>
             <a:spLocks noGrp="1"/>
@@ -12467,7 +12549,7 @@
             <a:lvl1pPr>
               <a:defRPr sz="900">
                 <a:solidFill>
-                  <a:srgbClr val="6B6F76"/>
+                  <a:srgbClr val="6E7B88"/>
                 </a:solidFill>
               </a:defRPr>
             </a:lvl1pPr>
@@ -12509,39 +12591,40 @@
       </p:grpSpPr>
       <p:sp>
         <p:nvSpPr>
-          <p:cNvPr id="2" name="Text 3"/>
-          <p:cNvSpPr/>
-          <p:nvPr>
-            <p:ph idx="103" type="title" hasCustomPrompt="1"/>
-          </p:nvPr>
-        </p:nvSpPr>
-        <p:spPr>
-          <a:xfrm>
-            <a:off x="457200" y="347472"/>
-            <a:ext cx="8229600" cy="685800"/>
-          </a:xfrm>
-          <a:prstGeom prst="rect">
-            <a:avLst/>
-          </a:prstGeom>
-          <a:noFill/>
-          <a:ln/>
-        </p:spPr>
-        <p:txBody>
-          <a:bodyPr wrap="square" lIns="0" tIns="0" rIns="0" bIns="0" rtlCol="0" anchor="ctr"/>
+          <p:cNvPr id="2" name="Text 0"/>
+          <p:cNvSpPr txBox="1"/>
+          <p:nvPr/>
+        </p:nvSpPr>
+        <p:spPr>
+          <a:xfrm>
+            <a:off x="457200" y="402336"/>
+            <a:ext cx="8229600" cy="749808"/>
+          </a:xfrm>
+          <a:prstGeom prst="rect">
+            <a:avLst/>
+          </a:prstGeom>
+          <a:noFill/>
+          <a:ln/>
+        </p:spPr>
+        <p:txBody>
+          <a:bodyPr wrap="square" lIns="0" tIns="0" rIns="0" bIns="0" rtlCol="0" anchor="t"/>
           <a:lstStyle/>
           <a:p>
             <a:pPr rtl="1" algn="r" indent="0" marL="0">
               <a:buNone/>
             </a:pPr>
             <a:r>
-              <a:rPr lang="en-US" sz="2600" b="1" dirty="0">
-                <a:solidFill>
-                  <a:srgbClr val="0B0B0B"/>
-                </a:solidFill>
+              <a:rPr lang="ar-AE" altLang="en-US" sz="2600" b="1" dirty="0">
+                <a:solidFill>
+                  <a:schemeClr val="tx1"/>
+                </a:solidFill>
+                <a:latin typeface="Cambria" pitchFamily="34" charset="0"/>
+                <a:ea typeface="Cambria" pitchFamily="34" charset="-122"/>
+                <a:cs typeface="Cambria" pitchFamily="34" charset="-120"/>
               </a:rPr>
               <a:t>خطة الإطلاق: 90 يوماً</a:t>
             </a:r>
-            <a:endParaRPr lang="en-US" sz="2600" dirty="0"/>
+            <a:endParaRPr lang="ar-AE" sz="2600" dirty="0"/>
           </a:p>
         </p:txBody>
       </p:sp>
@@ -12596,11 +12679,11 @@
             <a:avLst/>
           </a:prstGeom>
           <a:solidFill>
-            <a:srgbClr val="0B0B0B"/>
+            <a:srgbClr val="0E2238"/>
           </a:solidFill>
           <a:ln w="12700">
             <a:solidFill>
-              <a:srgbClr val="0B0B0B"/>
+              <a:srgbClr val="0E2238"/>
             </a:solidFill>
             <a:prstDash val="solid"/>
           </a:ln>
@@ -12657,11 +12740,11 @@
             <a:avLst/>
           </a:prstGeom>
           <a:solidFill>
-            <a:srgbClr val="F4F1EA"/>
+            <a:srgbClr val="F4F1EB"/>
           </a:solidFill>
           <a:ln w="12700">
             <a:solidFill>
-              <a:srgbClr val="F4F1EA"/>
+              <a:srgbClr val="F4F1EB"/>
             </a:solidFill>
             <a:prstDash val="solid"/>
           </a:ln>
@@ -12812,11 +12895,11 @@
             <a:avLst/>
           </a:prstGeom>
           <a:solidFill>
-            <a:srgbClr val="0B0B0B"/>
+            <a:srgbClr val="0E2238"/>
           </a:solidFill>
           <a:ln w="12700">
             <a:solidFill>
-              <a:srgbClr val="0B0B0B"/>
+              <a:srgbClr val="0E2238"/>
             </a:solidFill>
             <a:prstDash val="solid"/>
           </a:ln>
@@ -12873,11 +12956,11 @@
             <a:avLst/>
           </a:prstGeom>
           <a:solidFill>
-            <a:srgbClr val="F4F1EA"/>
+            <a:srgbClr val="F4F1EB"/>
           </a:solidFill>
           <a:ln w="12700">
             <a:solidFill>
-              <a:srgbClr val="F4F1EA"/>
+              <a:srgbClr val="F4F1EB"/>
             </a:solidFill>
             <a:prstDash val="solid"/>
           </a:ln>
@@ -13028,11 +13111,11 @@
             <a:avLst/>
           </a:prstGeom>
           <a:solidFill>
-            <a:srgbClr val="0B0B0B"/>
+            <a:srgbClr val="0E2238"/>
           </a:solidFill>
           <a:ln w="12700">
             <a:solidFill>
-              <a:srgbClr val="0B0B0B"/>
+              <a:srgbClr val="0E2238"/>
             </a:solidFill>
             <a:prstDash val="solid"/>
           </a:ln>
@@ -13089,11 +13172,11 @@
             <a:avLst/>
           </a:prstGeom>
           <a:solidFill>
-            <a:srgbClr val="F4F1EA"/>
+            <a:srgbClr val="F4F1EB"/>
           </a:solidFill>
           <a:ln w="12700">
             <a:solidFill>
-              <a:srgbClr val="F4F1EA"/>
+              <a:srgbClr val="F4F1EB"/>
             </a:solidFill>
             <a:prstDash val="solid"/>
           </a:ln>
@@ -13226,6 +13309,36 @@
               <a:t>مراجعة النتائج وتعديل النموذج</a:t>
             </a:r>
             <a:endParaRPr lang="ar-AE" sz="1050" dirty="0"/>
+          </a:p>
+        </p:txBody>
+      </p:sp>
+      <p:sp>
+        <p:nvSpPr>
+          <p:cNvPr id="19" name="Text 0"/>
+          <p:cNvSpPr/>
+          <p:nvPr>
+            <p:ph idx="101" type="title" hasCustomPrompt="1"/>
+          </p:nvPr>
+        </p:nvSpPr>
+        <p:spPr>
+          <a:xfrm>
+            <a:off x="457200" y="420624"/>
+            <a:ext cx="8229600" cy="731520"/>
+          </a:xfrm>
+          <a:prstGeom prst="rect">
+            <a:avLst/>
+          </a:prstGeom>
+          <a:noFill/>
+          <a:ln/>
+        </p:spPr>
+        <p:txBody>
+          <a:bodyPr wrap="square" lIns="0" tIns="0" rIns="0" bIns="0" rtlCol="0" anchor="t"/>
+          <a:lstStyle/>
+          <a:p>
+            <a:pPr algn="r" indent="0" marL="0">
+              <a:buNone/>
+            </a:pPr>
+            <a:endParaRPr lang="en-US" sz="2600" dirty="0"/>
           </a:p>
         </p:txBody>
       </p:sp>
@@ -13259,7 +13372,7 @@
             <a:lvl1pPr>
               <a:defRPr sz="900">
                 <a:solidFill>
-                  <a:srgbClr val="6B6F76"/>
+                  <a:srgbClr val="6E7B88"/>
                 </a:solidFill>
               </a:defRPr>
             </a:lvl1pPr>
@@ -13315,7 +13428,7 @@
           </a:prstGeom>
           <a:ln w="9525">
             <a:solidFill>
-              <a:srgbClr val="B08D57"/>
+              <a:srgbClr val="B5723B"/>
             </a:solidFill>
             <a:prstDash val="solid"/>
           </a:ln>
@@ -13465,7 +13578,7 @@
             <a:lvl1pPr>
               <a:defRPr sz="900">
                 <a:solidFill>
-                  <a:srgbClr val="D8C39A"/>
+                  <a:srgbClr val="D9B38C"/>
                 </a:solidFill>
               </a:defRPr>
             </a:lvl1pPr>
@@ -13521,7 +13634,7 @@
           </a:prstGeom>
           <a:ln w="9525">
             <a:solidFill>
-              <a:srgbClr val="B08D57"/>
+              <a:srgbClr val="B5723B"/>
             </a:solidFill>
             <a:prstDash val="solid"/>
           </a:ln>
@@ -13844,42 +13957,6 @@
       </p:sp>
       <p:sp>
         <p:nvSpPr>
-          <p:cNvPr id="13" name="Text 7"/>
-          <p:cNvSpPr txBox="1"/>
-          <p:nvPr/>
-        </p:nvSpPr>
-        <p:spPr>
-          <a:xfrm>
-            <a:off x="868680" y="4206240"/>
-            <a:ext cx="7406640" cy="365760"/>
-          </a:xfrm>
-          <a:prstGeom prst="rect">
-            <a:avLst/>
-          </a:prstGeom>
-          <a:noFill/>
-          <a:ln/>
-        </p:spPr>
-        <p:txBody>
-          <a:bodyPr wrap="square" lIns="0" tIns="0" rIns="0" bIns="0" rtlCol="0" anchor="ctr"/>
-          <a:lstStyle/>
-          <a:p>
-            <a:pPr rtl="1" algn="r" indent="0" marL="0">
-              <a:buNone/>
-            </a:pPr>
-            <a:r>
-              <a:rPr lang="ar-AE" altLang="en-US" sz="1000" dirty="0">
-                <a:solidFill>
-                  <a:schemeClr val="accent1"/>
-                </a:solidFill>
-              </a:rPr>
-              <a:t>راشد الكيتوب للمحاماة والاستشارات القانونية</a:t>
-            </a:r>
-            <a:endParaRPr lang="ar-AE" sz="1000" dirty="0"/>
-          </a:p>
-        </p:txBody>
-      </p:sp>
-      <p:sp>
-        <p:nvSpPr>
           <p:cNvPr id="25" name="Slide Number Placeholder 0"/>
           <p:cNvSpPr>
             <a:spLocks noGrp="1"/>
@@ -13908,7 +13985,7 @@
             <a:lvl1pPr>
               <a:defRPr sz="900">
                 <a:solidFill>
-                  <a:srgbClr val="D8C39A"/>
+                  <a:srgbClr val="D9B38C"/>
                 </a:solidFill>
               </a:defRPr>
             </a:lvl1pPr>
@@ -13995,17 +14072,17 @@
         </p:nvSpPr>
         <p:spPr>
           <a:xfrm>
-            <a:off x="914400" y="2834640"/>
-            <a:ext cx="7772400" cy="731520"/>
-          </a:xfrm>
-          <a:prstGeom prst="rect">
-            <a:avLst/>
-          </a:prstGeom>
-          <a:noFill/>
-          <a:ln/>
-        </p:spPr>
-        <p:txBody>
-          <a:bodyPr wrap="square" lIns="0" tIns="0" rIns="0" bIns="0" rtlCol="0" anchor="t"/>
+            <a:off x="914400" y="2743200"/>
+            <a:ext cx="7772400" cy="868680"/>
+          </a:xfrm>
+          <a:prstGeom prst="rect">
+            <a:avLst/>
+          </a:prstGeom>
+          <a:noFill/>
+          <a:ln/>
+        </p:spPr>
+        <p:txBody>
+          <a:bodyPr wrap="square" lIns="0" tIns="0" rIns="0" bIns="0" rtlCol="0" anchor="b"/>
           <a:lstStyle/>
           <a:p>
             <a:pPr rtl="1" algn="r" indent="0" marL="0">
@@ -14034,17 +14111,17 @@
         </p:nvSpPr>
         <p:spPr>
           <a:xfrm>
-            <a:off x="914400" y="3566160"/>
-            <a:ext cx="7772400" cy="548640"/>
-          </a:xfrm>
-          <a:prstGeom prst="rect">
-            <a:avLst/>
-          </a:prstGeom>
-          <a:noFill/>
-          <a:ln/>
-        </p:spPr>
-        <p:txBody>
-          <a:bodyPr wrap="square" lIns="0" tIns="0" rIns="0" bIns="0" rtlCol="0" anchor="ctr"/>
+            <a:off x="914400" y="3675888"/>
+            <a:ext cx="7772400" cy="502920"/>
+          </a:xfrm>
+          <a:prstGeom prst="rect">
+            <a:avLst/>
+          </a:prstGeom>
+          <a:noFill/>
+          <a:ln/>
+        </p:spPr>
+        <p:txBody>
+          <a:bodyPr wrap="square" lIns="0" tIns="0" rIns="0" bIns="0" rtlCol="0" anchor="t"/>
           <a:lstStyle/>
           <a:p>
             <a:pPr rtl="1" algn="r" indent="0" marL="0">
@@ -14092,7 +14169,7 @@
             <a:lvl1pPr>
               <a:defRPr sz="900">
                 <a:solidFill>
-                  <a:srgbClr val="D8C39A"/>
+                  <a:srgbClr val="D9B38C"/>
                 </a:solidFill>
               </a:defRPr>
             </a:lvl1pPr>
@@ -14134,39 +14211,40 @@
       </p:grpSpPr>
       <p:sp>
         <p:nvSpPr>
-          <p:cNvPr id="2" name="Text 3"/>
-          <p:cNvSpPr/>
-          <p:nvPr>
-            <p:ph idx="103" type="title" hasCustomPrompt="1"/>
-          </p:nvPr>
-        </p:nvSpPr>
-        <p:spPr>
-          <a:xfrm>
-            <a:off x="457200" y="347472"/>
-            <a:ext cx="8229600" cy="685800"/>
-          </a:xfrm>
-          <a:prstGeom prst="rect">
-            <a:avLst/>
-          </a:prstGeom>
-          <a:noFill/>
-          <a:ln/>
-        </p:spPr>
-        <p:txBody>
-          <a:bodyPr wrap="square" lIns="0" tIns="0" rIns="0" bIns="0" rtlCol="0" anchor="ctr"/>
+          <p:cNvPr id="2" name="Text 0"/>
+          <p:cNvSpPr txBox="1"/>
+          <p:nvPr/>
+        </p:nvSpPr>
+        <p:spPr>
+          <a:xfrm>
+            <a:off x="457200" y="402336"/>
+            <a:ext cx="8229600" cy="749808"/>
+          </a:xfrm>
+          <a:prstGeom prst="rect">
+            <a:avLst/>
+          </a:prstGeom>
+          <a:noFill/>
+          <a:ln/>
+        </p:spPr>
+        <p:txBody>
+          <a:bodyPr wrap="square" lIns="0" tIns="0" rIns="0" bIns="0" rtlCol="0" anchor="t"/>
           <a:lstStyle/>
           <a:p>
             <a:pPr rtl="1" algn="r" indent="0" marL="0">
               <a:buNone/>
             </a:pPr>
             <a:r>
-              <a:rPr lang="en-US" sz="2600" b="1" dirty="0">
-                <a:solidFill>
-                  <a:srgbClr val="0B0B0B"/>
-                </a:solidFill>
+              <a:rPr lang="ar-AE" altLang="en-US" sz="2600" b="1" dirty="0">
+                <a:solidFill>
+                  <a:schemeClr val="tx1"/>
+                </a:solidFill>
+                <a:latin typeface="Cambria" pitchFamily="34" charset="0"/>
+                <a:ea typeface="Cambria" pitchFamily="34" charset="-122"/>
+                <a:cs typeface="Cambria" pitchFamily="34" charset="-120"/>
               </a:rPr>
               <a:t>من «مكتب محاماة» إلى شريك حماية قانونية</a:t>
             </a:r>
-            <a:endParaRPr lang="en-US" sz="2600" dirty="0"/>
+            <a:endParaRPr lang="ar-AE" sz="2600" dirty="0"/>
           </a:p>
         </p:txBody>
       </p:sp>
@@ -14221,11 +14299,11 @@
             <a:avLst/>
           </a:prstGeom>
           <a:solidFill>
-            <a:srgbClr val="0B0B0B"/>
+            <a:srgbClr val="0E2238"/>
           </a:solidFill>
           <a:ln w="12700">
             <a:solidFill>
-              <a:srgbClr val="0B0B0B"/>
+              <a:srgbClr val="0E2238"/>
             </a:solidFill>
             <a:prstDash val="solid"/>
           </a:ln>
@@ -14264,7 +14342,7 @@
         <p:spPr>
           <a:xfrm>
             <a:off x="5715000" y="2103120"/>
-            <a:ext cx="2651760" cy="914400"/>
+            <a:ext cx="2651760" cy="1014984"/>
           </a:xfrm>
           <a:prstGeom prst="rect">
             <a:avLst/>
@@ -14302,8 +14380,8 @@
         </p:nvSpPr>
         <p:spPr>
           <a:xfrm>
-            <a:off x="5715000" y="3017520"/>
-            <a:ext cx="2651760" cy="1280160"/>
+            <a:off x="5715000" y="3163824"/>
+            <a:ext cx="2651760" cy="1179576"/>
           </a:xfrm>
           <a:prstGeom prst="rect">
             <a:avLst/>
@@ -14319,14 +14397,14 @@
               <a:buNone/>
             </a:pPr>
             <a:r>
-              <a:rPr lang="ar-AE" altLang="en-US" sz="1150" dirty="0">
+              <a:rPr lang="ar-AE" altLang="en-US" sz="1100" dirty="0">
                 <a:solidFill>
                   <a:schemeClr val="bg2"/>
                 </a:solidFill>
               </a:rPr>
               <a:t>نساعد شركاءنا على حماية عملائهم، ورفع قيمة خدماتهم، وزيادة ثقة المستثمر بهم.</a:t>
             </a:r>
-            <a:endParaRPr lang="ar-AE" sz="1150" dirty="0"/>
+            <a:endParaRPr lang="ar-AE" sz="1100" dirty="0"/>
           </a:p>
         </p:txBody>
       </p:sp>
@@ -14486,6 +14564,36 @@
               <a:t>نقول: نحميكم، نحمي عملاءكم، ونرفع قيمة ما تبيعونه.</a:t>
             </a:r>
             <a:endParaRPr lang="ar-AE" sz="1300" dirty="0"/>
+          </a:p>
+        </p:txBody>
+      </p:sp>
+      <p:sp>
+        <p:nvSpPr>
+          <p:cNvPr id="9" name="Text 0"/>
+          <p:cNvSpPr/>
+          <p:nvPr>
+            <p:ph idx="101" type="title" hasCustomPrompt="1"/>
+          </p:nvPr>
+        </p:nvSpPr>
+        <p:spPr>
+          <a:xfrm>
+            <a:off x="457200" y="420624"/>
+            <a:ext cx="8229600" cy="731520"/>
+          </a:xfrm>
+          <a:prstGeom prst="rect">
+            <a:avLst/>
+          </a:prstGeom>
+          <a:noFill/>
+          <a:ln/>
+        </p:spPr>
+        <p:txBody>
+          <a:bodyPr wrap="square" lIns="0" tIns="0" rIns="0" bIns="0" rtlCol="0" anchor="t"/>
+          <a:lstStyle/>
+          <a:p>
+            <a:pPr algn="r" indent="0" marL="0">
+              <a:buNone/>
+            </a:pPr>
+            <a:endParaRPr lang="en-US" sz="2600" dirty="0"/>
           </a:p>
         </p:txBody>
       </p:sp>
@@ -14519,7 +14627,7 @@
             <a:lvl1pPr>
               <a:defRPr sz="900">
                 <a:solidFill>
-                  <a:srgbClr val="6B6F76"/>
+                  <a:srgbClr val="6E7B88"/>
                 </a:solidFill>
               </a:defRPr>
             </a:lvl1pPr>
@@ -14561,39 +14669,40 @@
       </p:grpSpPr>
       <p:sp>
         <p:nvSpPr>
-          <p:cNvPr id="2" name="Text 3"/>
-          <p:cNvSpPr/>
-          <p:nvPr>
-            <p:ph idx="103" type="title" hasCustomPrompt="1"/>
-          </p:nvPr>
-        </p:nvSpPr>
-        <p:spPr>
-          <a:xfrm>
-            <a:off x="457200" y="347472"/>
-            <a:ext cx="8229600" cy="685800"/>
-          </a:xfrm>
-          <a:prstGeom prst="rect">
-            <a:avLst/>
-          </a:prstGeom>
-          <a:noFill/>
-          <a:ln/>
-        </p:spPr>
-        <p:txBody>
-          <a:bodyPr wrap="square" lIns="0" tIns="0" rIns="0" bIns="0" rtlCol="0" anchor="ctr"/>
+          <p:cNvPr id="2" name="Text 0"/>
+          <p:cNvSpPr txBox="1"/>
+          <p:nvPr/>
+        </p:nvSpPr>
+        <p:spPr>
+          <a:xfrm>
+            <a:off x="457200" y="402336"/>
+            <a:ext cx="8229600" cy="749808"/>
+          </a:xfrm>
+          <a:prstGeom prst="rect">
+            <a:avLst/>
+          </a:prstGeom>
+          <a:noFill/>
+          <a:ln/>
+        </p:spPr>
+        <p:txBody>
+          <a:bodyPr wrap="square" lIns="0" tIns="0" rIns="0" bIns="0" rtlCol="0" anchor="t"/>
           <a:lstStyle/>
           <a:p>
             <a:pPr rtl="1" algn="r" indent="0" marL="0">
               <a:buNone/>
             </a:pPr>
             <a:r>
-              <a:rPr lang="en-US" sz="2600" b="1" dirty="0">
-                <a:solidFill>
-                  <a:srgbClr val="0B0B0B"/>
-                </a:solidFill>
+              <a:rPr lang="ar-AE" altLang="en-US" sz="2600" b="1" dirty="0">
+                <a:solidFill>
+                  <a:schemeClr val="tx1"/>
+                </a:solidFill>
+                <a:latin typeface="Cambria" pitchFamily="34" charset="0"/>
+                <a:ea typeface="Cambria" pitchFamily="34" charset="-122"/>
+                <a:cs typeface="Cambria" pitchFamily="34" charset="-120"/>
               </a:rPr>
               <a:t>خدماتنا في حماية الأصول والتركات</a:t>
             </a:r>
-            <a:endParaRPr lang="en-US" sz="2600" dirty="0"/>
+            <a:endParaRPr lang="ar-AE" sz="2600" dirty="0"/>
           </a:p>
         </p:txBody>
       </p:sp>
@@ -14648,11 +14757,11 @@
             <a:avLst/>
           </a:prstGeom>
           <a:solidFill>
-            <a:srgbClr val="F4F1EA"/>
+            <a:srgbClr val="F4F1EB"/>
           </a:solidFill>
           <a:ln w="12700">
             <a:solidFill>
-              <a:srgbClr val="F4F1EA"/>
+              <a:srgbClr val="F4F1EB"/>
             </a:solidFill>
             <a:prstDash val="solid"/>
           </a:ln>
@@ -14753,11 +14862,11 @@
             <a:avLst/>
           </a:prstGeom>
           <a:solidFill>
-            <a:srgbClr val="F4F1EA"/>
+            <a:srgbClr val="F4F1EB"/>
           </a:solidFill>
           <a:ln w="12700">
             <a:solidFill>
-              <a:srgbClr val="F4F1EA"/>
+              <a:srgbClr val="F4F1EB"/>
             </a:solidFill>
             <a:prstDash val="solid"/>
           </a:ln>
@@ -14858,11 +14967,11 @@
             <a:avLst/>
           </a:prstGeom>
           <a:solidFill>
-            <a:srgbClr val="F4F1EA"/>
+            <a:srgbClr val="F4F1EB"/>
           </a:solidFill>
           <a:ln w="12700">
             <a:solidFill>
-              <a:srgbClr val="F4F1EA"/>
+              <a:srgbClr val="F4F1EB"/>
             </a:solidFill>
             <a:prstDash val="solid"/>
           </a:ln>
@@ -14963,11 +15072,11 @@
             <a:avLst/>
           </a:prstGeom>
           <a:solidFill>
-            <a:srgbClr val="F4F1EA"/>
+            <a:srgbClr val="F4F1EB"/>
           </a:solidFill>
           <a:ln w="12700">
             <a:solidFill>
-              <a:srgbClr val="F4F1EA"/>
+              <a:srgbClr val="F4F1EB"/>
             </a:solidFill>
             <a:prstDash val="solid"/>
           </a:ln>
@@ -15068,11 +15177,11 @@
             <a:avLst/>
           </a:prstGeom>
           <a:solidFill>
-            <a:srgbClr val="F4F1EA"/>
+            <a:srgbClr val="F4F1EB"/>
           </a:solidFill>
           <a:ln w="12700">
             <a:solidFill>
-              <a:srgbClr val="F4F1EA"/>
+              <a:srgbClr val="F4F1EB"/>
             </a:solidFill>
             <a:prstDash val="solid"/>
           </a:ln>
@@ -15173,11 +15282,11 @@
             <a:avLst/>
           </a:prstGeom>
           <a:solidFill>
-            <a:srgbClr val="F4F1EA"/>
+            <a:srgbClr val="F4F1EB"/>
           </a:solidFill>
           <a:ln w="12700">
             <a:solidFill>
-              <a:srgbClr val="F4F1EA"/>
+              <a:srgbClr val="F4F1EB"/>
             </a:solidFill>
             <a:prstDash val="solid"/>
           </a:ln>
@@ -15278,11 +15387,11 @@
             <a:avLst/>
           </a:prstGeom>
           <a:solidFill>
-            <a:srgbClr val="F4F1EA"/>
+            <a:srgbClr val="F4F1EB"/>
           </a:solidFill>
           <a:ln w="12700">
             <a:solidFill>
-              <a:srgbClr val="F4F1EA"/>
+              <a:srgbClr val="F4F1EB"/>
             </a:solidFill>
             <a:prstDash val="solid"/>
           </a:ln>
@@ -15383,11 +15492,11 @@
             <a:avLst/>
           </a:prstGeom>
           <a:solidFill>
-            <a:srgbClr val="F4F1EA"/>
+            <a:srgbClr val="F4F1EB"/>
           </a:solidFill>
           <a:ln w="12700">
             <a:solidFill>
-              <a:srgbClr val="F4F1EA"/>
+              <a:srgbClr val="F4F1EB"/>
             </a:solidFill>
             <a:prstDash val="solid"/>
           </a:ln>
@@ -15475,6 +15584,36 @@
       </p:sp>
       <p:sp>
         <p:nvSpPr>
+          <p:cNvPr id="28" name="Text 0"/>
+          <p:cNvSpPr/>
+          <p:nvPr>
+            <p:ph idx="101" type="title" hasCustomPrompt="1"/>
+          </p:nvPr>
+        </p:nvSpPr>
+        <p:spPr>
+          <a:xfrm>
+            <a:off x="457200" y="420624"/>
+            <a:ext cx="8229600" cy="731520"/>
+          </a:xfrm>
+          <a:prstGeom prst="rect">
+            <a:avLst/>
+          </a:prstGeom>
+          <a:noFill/>
+          <a:ln/>
+        </p:spPr>
+        <p:txBody>
+          <a:bodyPr wrap="square" lIns="0" tIns="0" rIns="0" bIns="0" rtlCol="0" anchor="t"/>
+          <a:lstStyle/>
+          <a:p>
+            <a:pPr algn="r" indent="0" marL="0">
+              <a:buNone/>
+            </a:pPr>
+            <a:endParaRPr lang="en-US" sz="2600" dirty="0"/>
+          </a:p>
+        </p:txBody>
+      </p:sp>
+      <p:sp>
+        <p:nvSpPr>
           <p:cNvPr id="25" name="Slide Number Placeholder 0"/>
           <p:cNvSpPr>
             <a:spLocks noGrp="1"/>
@@ -15503,7 +15642,7 @@
             <a:lvl1pPr>
               <a:defRPr sz="900">
                 <a:solidFill>
-                  <a:srgbClr val="6B6F76"/>
+                  <a:srgbClr val="6E7B88"/>
                 </a:solidFill>
               </a:defRPr>
             </a:lvl1pPr>
@@ -15545,39 +15684,40 @@
       </p:grpSpPr>
       <p:sp>
         <p:nvSpPr>
-          <p:cNvPr id="2" name="Text 3"/>
-          <p:cNvSpPr/>
-          <p:nvPr>
-            <p:ph idx="103" type="title" hasCustomPrompt="1"/>
-          </p:nvPr>
-        </p:nvSpPr>
-        <p:spPr>
-          <a:xfrm>
-            <a:off x="457200" y="347472"/>
-            <a:ext cx="8229600" cy="685800"/>
-          </a:xfrm>
-          <a:prstGeom prst="rect">
-            <a:avLst/>
-          </a:prstGeom>
-          <a:noFill/>
-          <a:ln/>
-        </p:spPr>
-        <p:txBody>
-          <a:bodyPr wrap="square" lIns="0" tIns="0" rIns="0" bIns="0" rtlCol="0" anchor="ctr"/>
+          <p:cNvPr id="2" name="Text 0"/>
+          <p:cNvSpPr txBox="1"/>
+          <p:nvPr/>
+        </p:nvSpPr>
+        <p:spPr>
+          <a:xfrm>
+            <a:off x="457200" y="402336"/>
+            <a:ext cx="8229600" cy="749808"/>
+          </a:xfrm>
+          <a:prstGeom prst="rect">
+            <a:avLst/>
+          </a:prstGeom>
+          <a:noFill/>
+          <a:ln/>
+        </p:spPr>
+        <p:txBody>
+          <a:bodyPr wrap="square" lIns="0" tIns="0" rIns="0" bIns="0" rtlCol="0" anchor="t"/>
           <a:lstStyle/>
           <a:p>
             <a:pPr rtl="1" algn="r" indent="0" marL="0">
               <a:buNone/>
             </a:pPr>
             <a:r>
-              <a:rPr lang="en-US" sz="2600" b="1" dirty="0">
-                <a:solidFill>
-                  <a:srgbClr val="0B0B0B"/>
-                </a:solidFill>
+              <a:rPr lang="ar-AE" altLang="en-US" sz="2600" b="1" dirty="0">
+                <a:solidFill>
+                  <a:schemeClr val="tx1"/>
+                </a:solidFill>
+                <a:latin typeface="Cambria" pitchFamily="34" charset="0"/>
+                <a:ea typeface="Cambria" pitchFamily="34" charset="-122"/>
+                <a:cs typeface="Cambria" pitchFamily="34" charset="-120"/>
               </a:rPr>
               <a:t>جهات تسجيل الوصايا في الإمارات</a:t>
             </a:r>
-            <a:endParaRPr lang="en-US" sz="2600" dirty="0"/>
+            <a:endParaRPr lang="ar-AE" sz="2600" dirty="0"/>
           </a:p>
         </p:txBody>
       </p:sp>
@@ -15632,11 +15772,11 @@
             <a:avLst/>
           </a:prstGeom>
           <a:solidFill>
-            <a:srgbClr val="F4F1EA"/>
+            <a:srgbClr val="F4F1EB"/>
           </a:solidFill>
           <a:ln w="12700">
             <a:solidFill>
-              <a:srgbClr val="F4F1EA"/>
+              <a:srgbClr val="F4F1EB"/>
             </a:solidFill>
             <a:prstDash val="solid"/>
           </a:ln>
@@ -15737,11 +15877,11 @@
             <a:avLst/>
           </a:prstGeom>
           <a:solidFill>
-            <a:srgbClr val="F4F1EA"/>
+            <a:srgbClr val="F4F1EB"/>
           </a:solidFill>
           <a:ln w="12700">
             <a:solidFill>
-              <a:srgbClr val="F4F1EA"/>
+              <a:srgbClr val="F4F1EB"/>
             </a:solidFill>
             <a:prstDash val="solid"/>
           </a:ln>
@@ -15842,11 +15982,11 @@
             <a:avLst/>
           </a:prstGeom>
           <a:solidFill>
-            <a:srgbClr val="F4F1EA"/>
+            <a:srgbClr val="F4F1EB"/>
           </a:solidFill>
           <a:ln w="12700">
             <a:solidFill>
-              <a:srgbClr val="F4F1EA"/>
+              <a:srgbClr val="F4F1EB"/>
             </a:solidFill>
             <a:prstDash val="solid"/>
           </a:ln>
@@ -15947,11 +16087,11 @@
             <a:avLst/>
           </a:prstGeom>
           <a:solidFill>
-            <a:srgbClr val="F4F1EA"/>
+            <a:srgbClr val="F4F1EB"/>
           </a:solidFill>
           <a:ln w="12700">
             <a:solidFill>
-              <a:srgbClr val="F4F1EA"/>
+              <a:srgbClr val="F4F1EB"/>
             </a:solidFill>
             <a:prstDash val="solid"/>
           </a:ln>
@@ -16052,11 +16192,11 @@
             <a:avLst/>
           </a:prstGeom>
           <a:solidFill>
-            <a:srgbClr val="F4F1EA"/>
+            <a:srgbClr val="F4F1EB"/>
           </a:solidFill>
           <a:ln w="12700">
             <a:solidFill>
-              <a:srgbClr val="F4F1EA"/>
+              <a:srgbClr val="F4F1EB"/>
             </a:solidFill>
             <a:prstDash val="solid"/>
           </a:ln>
@@ -16157,11 +16297,11 @@
             <a:avLst/>
           </a:prstGeom>
           <a:solidFill>
-            <a:srgbClr val="0B0B0B"/>
+            <a:srgbClr val="0E2238"/>
           </a:solidFill>
           <a:ln w="12700">
             <a:solidFill>
-              <a:srgbClr val="0B0B0B"/>
+              <a:srgbClr val="0E2238"/>
             </a:solidFill>
             <a:prstDash val="solid"/>
           </a:ln>
@@ -16183,7 +16323,7 @@
           </a:prstGeom>
           <a:ln w="9525">
             <a:solidFill>
-              <a:srgbClr val="B08D57"/>
+              <a:srgbClr val="B5723B"/>
             </a:solidFill>
             <a:prstDash val="solid"/>
           </a:ln>
@@ -16261,6 +16401,36 @@
               <a:t>الجنسية، الديانة، الحالة العائلية، وموقع الأصول تحدد المسار الأنسب. لذلك نبدأ دائماً بجلسة اكتشاف لا بنوع الوصية.</a:t>
             </a:r>
             <a:endParaRPr lang="ar-AE" sz="1150" dirty="0"/>
+          </a:p>
+        </p:txBody>
+      </p:sp>
+      <p:sp>
+        <p:nvSpPr>
+          <p:cNvPr id="23" name="Text 0"/>
+          <p:cNvSpPr/>
+          <p:nvPr>
+            <p:ph idx="101" type="title" hasCustomPrompt="1"/>
+          </p:nvPr>
+        </p:nvSpPr>
+        <p:spPr>
+          <a:xfrm>
+            <a:off x="457200" y="420624"/>
+            <a:ext cx="8229600" cy="731520"/>
+          </a:xfrm>
+          <a:prstGeom prst="rect">
+            <a:avLst/>
+          </a:prstGeom>
+          <a:noFill/>
+          <a:ln/>
+        </p:spPr>
+        <p:txBody>
+          <a:bodyPr wrap="square" lIns="0" tIns="0" rIns="0" bIns="0" rtlCol="0" anchor="t"/>
+          <a:lstStyle/>
+          <a:p>
+            <a:pPr algn="r" indent="0" marL="0">
+              <a:buNone/>
+            </a:pPr>
+            <a:endParaRPr lang="en-US" sz="2600" dirty="0"/>
           </a:p>
         </p:txBody>
       </p:sp>
@@ -16294,7 +16464,7 @@
             <a:lvl1pPr>
               <a:defRPr sz="900">
                 <a:solidFill>
-                  <a:srgbClr val="6B6F76"/>
+                  <a:srgbClr val="6E7B88"/>
                 </a:solidFill>
               </a:defRPr>
             </a:lvl1pPr>
@@ -16381,17 +16551,17 @@
         </p:nvSpPr>
         <p:spPr>
           <a:xfrm>
-            <a:off x="914400" y="2834640"/>
-            <a:ext cx="7772400" cy="731520"/>
-          </a:xfrm>
-          <a:prstGeom prst="rect">
-            <a:avLst/>
-          </a:prstGeom>
-          <a:noFill/>
-          <a:ln/>
-        </p:spPr>
-        <p:txBody>
-          <a:bodyPr wrap="square" lIns="0" tIns="0" rIns="0" bIns="0" rtlCol="0" anchor="t"/>
+            <a:off x="914400" y="2743200"/>
+            <a:ext cx="7772400" cy="868680"/>
+          </a:xfrm>
+          <a:prstGeom prst="rect">
+            <a:avLst/>
+          </a:prstGeom>
+          <a:noFill/>
+          <a:ln/>
+        </p:spPr>
+        <p:txBody>
+          <a:bodyPr wrap="square" lIns="0" tIns="0" rIns="0" bIns="0" rtlCol="0" anchor="b"/>
           <a:lstStyle/>
           <a:p>
             <a:pPr rtl="1" algn="r" indent="0" marL="0">
@@ -16420,17 +16590,17 @@
         </p:nvSpPr>
         <p:spPr>
           <a:xfrm>
-            <a:off x="914400" y="3566160"/>
-            <a:ext cx="7772400" cy="548640"/>
-          </a:xfrm>
-          <a:prstGeom prst="rect">
-            <a:avLst/>
-          </a:prstGeom>
-          <a:noFill/>
-          <a:ln/>
-        </p:spPr>
-        <p:txBody>
-          <a:bodyPr wrap="square" lIns="0" tIns="0" rIns="0" bIns="0" rtlCol="0" anchor="ctr"/>
+            <a:off x="914400" y="3675888"/>
+            <a:ext cx="7772400" cy="502920"/>
+          </a:xfrm>
+          <a:prstGeom prst="rect">
+            <a:avLst/>
+          </a:prstGeom>
+          <a:noFill/>
+          <a:ln/>
+        </p:spPr>
+        <p:txBody>
+          <a:bodyPr wrap="square" lIns="0" tIns="0" rIns="0" bIns="0" rtlCol="0" anchor="t"/>
           <a:lstStyle/>
           <a:p>
             <a:pPr rtl="1" algn="r" indent="0" marL="0">
@@ -16478,7 +16648,7 @@
             <a:lvl1pPr>
               <a:defRPr sz="900">
                 <a:solidFill>
-                  <a:srgbClr val="D8C39A"/>
+                  <a:srgbClr val="D9B38C"/>
                 </a:solidFill>
               </a:defRPr>
             </a:lvl1pPr>
@@ -16520,39 +16690,40 @@
       </p:grpSpPr>
       <p:sp>
         <p:nvSpPr>
-          <p:cNvPr id="2" name="Text 3"/>
-          <p:cNvSpPr/>
-          <p:nvPr>
-            <p:ph idx="103" type="title" hasCustomPrompt="1"/>
-          </p:nvPr>
-        </p:nvSpPr>
-        <p:spPr>
-          <a:xfrm>
-            <a:off x="457200" y="347472"/>
-            <a:ext cx="8229600" cy="685800"/>
-          </a:xfrm>
-          <a:prstGeom prst="rect">
-            <a:avLst/>
-          </a:prstGeom>
-          <a:noFill/>
-          <a:ln/>
-        </p:spPr>
-        <p:txBody>
-          <a:bodyPr wrap="square" lIns="0" tIns="0" rIns="0" bIns="0" rtlCol="0" anchor="ctr"/>
+          <p:cNvPr id="2" name="Text 0"/>
+          <p:cNvSpPr txBox="1"/>
+          <p:nvPr/>
+        </p:nvSpPr>
+        <p:spPr>
+          <a:xfrm>
+            <a:off x="457200" y="402336"/>
+            <a:ext cx="8229600" cy="749808"/>
+          </a:xfrm>
+          <a:prstGeom prst="rect">
+            <a:avLst/>
+          </a:prstGeom>
+          <a:noFill/>
+          <a:ln/>
+        </p:spPr>
+        <p:txBody>
+          <a:bodyPr wrap="square" lIns="0" tIns="0" rIns="0" bIns="0" rtlCol="0" anchor="t"/>
           <a:lstStyle/>
           <a:p>
             <a:pPr rtl="1" algn="r" indent="0" marL="0">
               <a:buNone/>
             </a:pPr>
             <a:r>
-              <a:rPr lang="en-US" sz="2600" b="1" dirty="0">
-                <a:solidFill>
-                  <a:srgbClr val="0B0B0B"/>
-                </a:solidFill>
+              <a:rPr lang="ar-AE" altLang="en-US" sz="2600" b="1" dirty="0">
+                <a:solidFill>
+                  <a:schemeClr val="tx1"/>
+                </a:solidFill>
+                <a:latin typeface="Cambria" pitchFamily="34" charset="0"/>
+                <a:ea typeface="Cambria" pitchFamily="34" charset="-122"/>
+                <a:cs typeface="Cambria" pitchFamily="34" charset="-120"/>
               </a:rPr>
               <a:t>لماذا الوسيط العقاري هو البوابة</a:t>
             </a:r>
-            <a:endParaRPr lang="en-US" sz="2600" dirty="0"/>
+            <a:endParaRPr lang="ar-AE" sz="2600" dirty="0"/>
           </a:p>
         </p:txBody>
       </p:sp>
@@ -16607,11 +16778,11 @@
             <a:avLst/>
           </a:prstGeom>
           <a:solidFill>
-            <a:srgbClr val="F4F1EA"/>
+            <a:srgbClr val="F4F1EB"/>
           </a:solidFill>
           <a:ln w="12700">
             <a:solidFill>
-              <a:srgbClr val="F4F1EA"/>
+              <a:srgbClr val="F4F1EB"/>
             </a:solidFill>
             <a:prstDash val="solid"/>
           </a:ln>
@@ -16712,11 +16883,11 @@
             <a:avLst/>
           </a:prstGeom>
           <a:solidFill>
-            <a:srgbClr val="F4F1EA"/>
+            <a:srgbClr val="F4F1EB"/>
           </a:solidFill>
           <a:ln w="12700">
             <a:solidFill>
-              <a:srgbClr val="F4F1EA"/>
+              <a:srgbClr val="F4F1EB"/>
             </a:solidFill>
             <a:prstDash val="solid"/>
           </a:ln>
@@ -16817,11 +16988,11 @@
             <a:avLst/>
           </a:prstGeom>
           <a:solidFill>
-            <a:srgbClr val="F4F1EA"/>
+            <a:srgbClr val="F4F1EB"/>
           </a:solidFill>
           <a:ln w="12700">
             <a:solidFill>
-              <a:srgbClr val="F4F1EA"/>
+              <a:srgbClr val="F4F1EB"/>
             </a:solidFill>
             <a:prstDash val="solid"/>
           </a:ln>
@@ -16922,11 +17093,11 @@
             <a:avLst/>
           </a:prstGeom>
           <a:solidFill>
-            <a:srgbClr val="F4F1EA"/>
+            <a:srgbClr val="F4F1EB"/>
           </a:solidFill>
           <a:ln w="12700">
             <a:solidFill>
-              <a:srgbClr val="F4F1EA"/>
+              <a:srgbClr val="F4F1EB"/>
             </a:solidFill>
             <a:prstDash val="solid"/>
           </a:ln>
@@ -17027,11 +17198,11 @@
             <a:avLst/>
           </a:prstGeom>
           <a:solidFill>
-            <a:srgbClr val="0B0B0B"/>
+            <a:srgbClr val="0E2238"/>
           </a:solidFill>
           <a:ln w="12700">
             <a:solidFill>
-              <a:srgbClr val="0B0B0B"/>
+              <a:srgbClr val="0E2238"/>
             </a:solidFill>
             <a:prstDash val="solid"/>
           </a:ln>
@@ -17053,7 +17224,7 @@
           </a:prstGeom>
           <a:ln w="9525">
             <a:solidFill>
-              <a:srgbClr val="B08D57"/>
+              <a:srgbClr val="B5723B"/>
             </a:solidFill>
             <a:prstDash val="solid"/>
           </a:ln>
@@ -17173,6 +17344,36 @@
               <a:t>4. دخل إضافي عبر هيكل الإحالة.</a:t>
             </a:r>
             <a:endParaRPr lang="ar-AE" sz="1150" dirty="0"/>
+          </a:p>
+        </p:txBody>
+      </p:sp>
+      <p:sp>
+        <p:nvSpPr>
+          <p:cNvPr id="20" name="Text 0"/>
+          <p:cNvSpPr/>
+          <p:nvPr>
+            <p:ph idx="101" type="title" hasCustomPrompt="1"/>
+          </p:nvPr>
+        </p:nvSpPr>
+        <p:spPr>
+          <a:xfrm>
+            <a:off x="457200" y="420624"/>
+            <a:ext cx="8229600" cy="731520"/>
+          </a:xfrm>
+          <a:prstGeom prst="rect">
+            <a:avLst/>
+          </a:prstGeom>
+          <a:noFill/>
+          <a:ln/>
+        </p:spPr>
+        <p:txBody>
+          <a:bodyPr wrap="square" lIns="0" tIns="0" rIns="0" bIns="0" rtlCol="0" anchor="t"/>
+          <a:lstStyle/>
+          <a:p>
+            <a:pPr algn="r" indent="0" marL="0">
+              <a:buNone/>
+            </a:pPr>
+            <a:endParaRPr lang="en-US" sz="2600" dirty="0"/>
           </a:p>
         </p:txBody>
       </p:sp>
@@ -17206,7 +17407,7 @@
             <a:lvl1pPr>
               <a:defRPr sz="900">
                 <a:solidFill>
-                  <a:srgbClr val="6B6F76"/>
+                  <a:srgbClr val="6E7B88"/>
                 </a:solidFill>
               </a:defRPr>
             </a:lvl1pPr>
@@ -17248,39 +17449,40 @@
       </p:grpSpPr>
       <p:sp>
         <p:nvSpPr>
-          <p:cNvPr id="2" name="Text 3"/>
-          <p:cNvSpPr/>
-          <p:nvPr>
-            <p:ph idx="103" type="title" hasCustomPrompt="1"/>
-          </p:nvPr>
-        </p:nvSpPr>
-        <p:spPr>
-          <a:xfrm>
-            <a:off x="457200" y="347472"/>
-            <a:ext cx="8229600" cy="685800"/>
-          </a:xfrm>
-          <a:prstGeom prst="rect">
-            <a:avLst/>
-          </a:prstGeom>
-          <a:noFill/>
-          <a:ln/>
-        </p:spPr>
-        <p:txBody>
-          <a:bodyPr wrap="square" lIns="0" tIns="0" rIns="0" bIns="0" rtlCol="0" anchor="ctr"/>
+          <p:cNvPr id="2" name="Text 0"/>
+          <p:cNvSpPr txBox="1"/>
+          <p:nvPr/>
+        </p:nvSpPr>
+        <p:spPr>
+          <a:xfrm>
+            <a:off x="457200" y="402336"/>
+            <a:ext cx="8229600" cy="749808"/>
+          </a:xfrm>
+          <a:prstGeom prst="rect">
+            <a:avLst/>
+          </a:prstGeom>
+          <a:noFill/>
+          <a:ln/>
+        </p:spPr>
+        <p:txBody>
+          <a:bodyPr wrap="square" lIns="0" tIns="0" rIns="0" bIns="0" rtlCol="0" anchor="t"/>
           <a:lstStyle/>
           <a:p>
             <a:pPr rtl="1" algn="r" indent="0" marL="0">
               <a:buNone/>
             </a:pPr>
             <a:r>
-              <a:rPr lang="en-US" sz="2600" b="1" dirty="0">
-                <a:solidFill>
-                  <a:srgbClr val="0B0B0B"/>
-                </a:solidFill>
+              <a:rPr lang="ar-AE" altLang="en-US" sz="2600" b="1" dirty="0">
+                <a:solidFill>
+                  <a:schemeClr val="tx1"/>
+                </a:solidFill>
+                <a:latin typeface="Cambria" pitchFamily="34" charset="0"/>
+                <a:ea typeface="Cambria" pitchFamily="34" charset="-122"/>
+                <a:cs typeface="Cambria" pitchFamily="34" charset="-120"/>
               </a:rPr>
               <a:t>من نستهدف</a:t>
             </a:r>
-            <a:endParaRPr lang="en-US" sz="2600" dirty="0"/>
+            <a:endParaRPr lang="ar-AE" sz="2600" dirty="0"/>
           </a:p>
         </p:txBody>
       </p:sp>
@@ -17335,11 +17537,11 @@
             <a:avLst/>
           </a:prstGeom>
           <a:solidFill>
-            <a:srgbClr val="B08D57"/>
+            <a:srgbClr val="B5723B"/>
           </a:solidFill>
           <a:ln w="12700">
             <a:solidFill>
-              <a:srgbClr val="B08D57"/>
+              <a:srgbClr val="B5723B"/>
             </a:solidFill>
             <a:prstDash val="solid"/>
           </a:ln>
@@ -17396,11 +17598,11 @@
             <a:avLst/>
           </a:prstGeom>
           <a:solidFill>
-            <a:srgbClr val="F4F1EA"/>
+            <a:srgbClr val="F4F1EB"/>
           </a:solidFill>
           <a:ln w="12700">
             <a:solidFill>
-              <a:srgbClr val="F4F1EA"/>
+              <a:srgbClr val="F4F1EB"/>
             </a:solidFill>
             <a:prstDash val="solid"/>
           </a:ln>
@@ -17515,11 +17717,11 @@
             <a:avLst/>
           </a:prstGeom>
           <a:solidFill>
-            <a:srgbClr val="0B0B0B"/>
+            <a:srgbClr val="0E2238"/>
           </a:solidFill>
           <a:ln w="12700">
             <a:solidFill>
-              <a:srgbClr val="0B0B0B"/>
+              <a:srgbClr val="0E2238"/>
             </a:solidFill>
             <a:prstDash val="solid"/>
           </a:ln>
@@ -17576,11 +17778,11 @@
             <a:avLst/>
           </a:prstGeom>
           <a:solidFill>
-            <a:srgbClr val="F4F1EA"/>
+            <a:srgbClr val="F4F1EB"/>
           </a:solidFill>
           <a:ln w="12700">
             <a:solidFill>
-              <a:srgbClr val="F4F1EA"/>
+              <a:srgbClr val="F4F1EB"/>
             </a:solidFill>
             <a:prstDash val="solid"/>
           </a:ln>
@@ -17695,6 +17897,36 @@
               <a:t>أصحاب الحسابات البنكية الكبيرة</a:t>
             </a:r>
             <a:endParaRPr lang="ar-AE" sz="1100" dirty="0"/>
+          </a:p>
+        </p:txBody>
+      </p:sp>
+      <p:sp>
+        <p:nvSpPr>
+          <p:cNvPr id="12" name="Text 0"/>
+          <p:cNvSpPr/>
+          <p:nvPr>
+            <p:ph idx="101" type="title" hasCustomPrompt="1"/>
+          </p:nvPr>
+        </p:nvSpPr>
+        <p:spPr>
+          <a:xfrm>
+            <a:off x="457200" y="420624"/>
+            <a:ext cx="8229600" cy="731520"/>
+          </a:xfrm>
+          <a:prstGeom prst="rect">
+            <a:avLst/>
+          </a:prstGeom>
+          <a:noFill/>
+          <a:ln/>
+        </p:spPr>
+        <p:txBody>
+          <a:bodyPr wrap="square" lIns="0" tIns="0" rIns="0" bIns="0" rtlCol="0" anchor="t"/>
+          <a:lstStyle/>
+          <a:p>
+            <a:pPr algn="r" indent="0" marL="0">
+              <a:buNone/>
+            </a:pPr>
+            <a:endParaRPr lang="en-US" sz="2600" dirty="0"/>
           </a:p>
         </p:txBody>
       </p:sp>
@@ -17728,7 +17960,7 @@
             <a:lvl1pPr>
               <a:defRPr sz="900">
                 <a:solidFill>
-                  <a:srgbClr val="6B6F76"/>
+                  <a:srgbClr val="6E7B88"/>
                 </a:solidFill>
               </a:defRPr>
             </a:lvl1pPr>
@@ -17752,47 +17984,47 @@
 </file>
 
 <file path=ppt/theme/theme1.xml><?xml version="1.0" encoding="utf-8"?>
-<a:theme xmlns:a="http://schemas.openxmlformats.org/drawingml/2006/main" name="RK Advocates">
+<a:theme xmlns:a="http://schemas.openxmlformats.org/drawingml/2006/main" name="Midnight Copper">
   <a:themeElements>
-    <a:clrScheme name="RK Advocates">
+    <a:clrScheme name="Midnight Copper">
       <a:dk1>
-        <a:srgbClr val="0B0B0B"/>
+        <a:srgbClr val="0E2238"/>
       </a:dk1>
       <a:lt1>
         <a:srgbClr val="FFFFFF"/>
       </a:lt1>
       <a:dk2>
-        <a:srgbClr val="2A2D33"/>
+        <a:srgbClr val="1F3A52"/>
       </a:dk2>
       <a:lt2>
-        <a:srgbClr val="F4F1EA"/>
+        <a:srgbClr val="F4F1EB"/>
       </a:lt2>
       <a:accent1>
-        <a:srgbClr val="B08D57"/>
+        <a:srgbClr val="B5723B"/>
       </a:accent1>
       <a:accent2>
-        <a:srgbClr val="D8C39A"/>
+        <a:srgbClr val="D9B38C"/>
       </a:accent2>
       <a:accent3>
-        <a:srgbClr val="6B6F76"/>
+        <a:srgbClr val="6E7B88"/>
       </a:accent3>
       <a:accent4>
-        <a:srgbClr val="8A6D3B"/>
+        <a:srgbClr val="8C5527"/>
       </a:accent4>
       <a:accent5>
-        <a:srgbClr val="E9E4DA"/>
+        <a:srgbClr val="E6E1D8"/>
       </a:accent5>
       <a:accent6>
-        <a:srgbClr val="15171B"/>
+        <a:srgbClr val="5B7A8C"/>
       </a:accent6>
       <a:hlink>
-        <a:srgbClr val="B08D57"/>
+        <a:srgbClr val="B5723B"/>
       </a:hlink>
       <a:folHlink>
-        <a:srgbClr val="8A6D3B"/>
+        <a:srgbClr val="8C5527"/>
       </a:folHlink>
     </a:clrScheme>
-    <a:fontScheme name="RK Advocates">
+    <a:fontScheme name="Midnight Copper">
       <a:majorFont>
         <a:latin typeface="Cambria"/>
         <a:ea typeface=""/>
